--- a/Tp1_Green_IT/dashboard.pptx
+++ b/Tp1_Green_IT/dashboard.pptx
@@ -1,29 +1,29 @@
 
 <file path=ppt/presentation.xml><?xml version="1.0" encoding="utf-8"?>
-<p:presentation xmlns:a="http://schemas.openxmlformats.org/drawingml/2006/main" xmlns:r="http://schemas.openxmlformats.org/officeDocument/2006/relationships" xmlns:p="http://schemas.openxmlformats.org/presentationml/2006/main" saveSubsetFonts="1" embedTrueTypeFonts="true">
+<p:presentation xmlns:a="http://schemas.openxmlformats.org/drawingml/2006/main" xmlns:r="http://schemas.openxmlformats.org/officeDocument/2006/relationships" xmlns:p="http://schemas.openxmlformats.org/presentationml/2006/main" embedTrueTypeFonts="1" saveSubsetFonts="1">
   <p:sldMasterIdLst>
     <p:sldMasterId id="2147483648" r:id="rId1"/>
   </p:sldMasterIdLst>
   <p:sldIdLst>
-    <p:sldId id="256" r:id="rId6"/>
-    <p:sldId id="257" r:id="rId7"/>
-    <p:sldId id="258" r:id="rId8"/>
-    <p:sldId id="259" r:id="rId9"/>
-    <p:sldId id="260" r:id="rId10"/>
-    <p:sldId id="261" r:id="rId11"/>
-    <p:sldId id="262" r:id="rId12"/>
-    <p:sldId id="263" r:id="rId13"/>
+    <p:sldId id="256" r:id="rId2"/>
+    <p:sldId id="257" r:id="rId3"/>
+    <p:sldId id="258" r:id="rId4"/>
+    <p:sldId id="259" r:id="rId5"/>
+    <p:sldId id="260" r:id="rId6"/>
+    <p:sldId id="261" r:id="rId7"/>
+    <p:sldId id="262" r:id="rId8"/>
+    <p:sldId id="263" r:id="rId9"/>
   </p:sldIdLst>
   <p:sldSz cx="18288000" cy="10287000"/>
   <p:notesSz cx="6858000" cy="9144000"/>
   <p:embeddedFontLst>
     <p:embeddedFont>
-      <p:font typeface="Open Sauce" charset="1" panose="00000500000000000000"/>
-      <p:regular r:id="rId14"/>
+      <p:font typeface="Open Sauce" panose="020B0604020202020204" charset="0"/>
+      <p:regular r:id="rId10"/>
     </p:embeddedFont>
     <p:embeddedFont>
-      <p:font typeface="Open Sauce Bold" charset="1" panose="00000800000000000000"/>
-      <p:regular r:id="rId15"/>
+      <p:font typeface="Open Sauce Bold" panose="020B0604020202020204" charset="0"/>
+      <p:regular r:id="rId11"/>
     </p:embeddedFont>
   </p:embeddedFontLst>
   <p:defaultTextStyle>
@@ -121,6 +121,22 @@
       </a:defRPr>
     </a:lvl9pPr>
   </p:defaultTextStyle>
+  <p:extLst>
+    <p:ext uri="{EFAFB233-063F-42B5-8137-9DF3F51BA10A}">
+      <p15:sldGuideLst xmlns:p15="http://schemas.microsoft.com/office/powerpoint/2012/main">
+        <p15:guide id="1" orient="horz" pos="2160">
+          <p15:clr>
+            <a:srgbClr val="A4A3A4"/>
+          </p15:clr>
+        </p15:guide>
+        <p15:guide id="2" pos="2880">
+          <p15:clr>
+            <a:srgbClr val="A4A3A4"/>
+          </p15:clr>
+        </p15:guide>
+      </p15:sldGuideLst>
+    </p:ext>
+  </p:extLst>
 </p:presentation>
 </file>
 
@@ -162,10 +178,9 @@
           <a:lstStyle/>
           <a:p>
             <a:r>
-              <a:rPr lang="en-US" smtClean="0"/>
+              <a:rPr lang="en-US"/>
               <a:t>Click to edit Master title style</a:t>
             </a:r>
-            <a:endParaRPr lang="en-US"/>
           </a:p>
         </p:txBody>
       </p:sp>
@@ -281,10 +296,9 @@
           </a:lstStyle>
           <a:p>
             <a:r>
-              <a:rPr lang="en-US" smtClean="0"/>
+              <a:rPr lang="en-US"/>
               <a:t>Click to edit Master subtitle style</a:t>
             </a:r>
-            <a:endParaRPr lang="en-US"/>
           </a:p>
         </p:txBody>
       </p:sp>
@@ -306,7 +320,7 @@
             <a:fld id="{1D8BD707-D9CF-40AE-B4C6-C98DA3205C09}" type="datetimeFigureOut">
               <a:rPr lang="en-US" smtClean="0"/>
               <a:pPr/>
-              <a:t>8/1/2011</a:t>
+              <a:t>10/31/2025</a:t>
             </a:fld>
             <a:endParaRPr lang="en-US"/>
           </a:p>
@@ -349,7 +363,7 @@
             <a:fld id="{B6F15528-21DE-4FAA-801E-634DDDAF4B2B}" type="slidenum">
               <a:rPr lang="en-US" smtClean="0"/>
               <a:pPr/>
-              <a:t>‹#›</a:t>
+              <a:t>‹N°›</a:t>
             </a:fld>
             <a:endParaRPr lang="en-US"/>
           </a:p>
@@ -396,10 +410,9 @@
           <a:lstStyle/>
           <a:p>
             <a:r>
-              <a:rPr lang="en-US" smtClean="0"/>
+              <a:rPr lang="en-US"/>
               <a:t>Click to edit Master title style</a:t>
             </a:r>
-            <a:endParaRPr lang="en-US"/>
           </a:p>
         </p:txBody>
       </p:sp>
@@ -420,38 +433,37 @@
           <a:p>
             <a:pPr lvl="0"/>
             <a:r>
-              <a:rPr lang="en-US" smtClean="0"/>
+              <a:rPr lang="en-US"/>
               <a:t>Click to edit Master text styles</a:t>
             </a:r>
           </a:p>
           <a:p>
             <a:pPr lvl="1"/>
             <a:r>
-              <a:rPr lang="en-US" smtClean="0"/>
+              <a:rPr lang="en-US"/>
               <a:t>Second level</a:t>
             </a:r>
           </a:p>
           <a:p>
             <a:pPr lvl="2"/>
             <a:r>
-              <a:rPr lang="en-US" smtClean="0"/>
+              <a:rPr lang="en-US"/>
               <a:t>Third level</a:t>
             </a:r>
           </a:p>
           <a:p>
             <a:pPr lvl="3"/>
             <a:r>
-              <a:rPr lang="en-US" smtClean="0"/>
+              <a:rPr lang="en-US"/>
               <a:t>Fourth level</a:t>
             </a:r>
           </a:p>
           <a:p>
             <a:pPr lvl="4"/>
             <a:r>
-              <a:rPr lang="en-US" smtClean="0"/>
+              <a:rPr lang="en-US"/>
               <a:t>Fifth level</a:t>
             </a:r>
-            <a:endParaRPr lang="en-US"/>
           </a:p>
         </p:txBody>
       </p:sp>
@@ -473,7 +485,7 @@
             <a:fld id="{1D8BD707-D9CF-40AE-B4C6-C98DA3205C09}" type="datetimeFigureOut">
               <a:rPr lang="en-US" smtClean="0"/>
               <a:pPr/>
-              <a:t>8/1/2011</a:t>
+              <a:t>10/31/2025</a:t>
             </a:fld>
             <a:endParaRPr lang="en-US"/>
           </a:p>
@@ -516,7 +528,7 @@
             <a:fld id="{B6F15528-21DE-4FAA-801E-634DDDAF4B2B}" type="slidenum">
               <a:rPr lang="en-US" smtClean="0"/>
               <a:pPr/>
-              <a:t>‹#›</a:t>
+              <a:t>‹N°›</a:t>
             </a:fld>
             <a:endParaRPr lang="en-US"/>
           </a:p>
@@ -568,10 +580,9 @@
           <a:lstStyle/>
           <a:p>
             <a:r>
-              <a:rPr lang="en-US" smtClean="0"/>
+              <a:rPr lang="en-US"/>
               <a:t>Click to edit Master title style</a:t>
             </a:r>
-            <a:endParaRPr lang="en-US"/>
           </a:p>
         </p:txBody>
       </p:sp>
@@ -597,38 +608,37 @@
           <a:p>
             <a:pPr lvl="0"/>
             <a:r>
-              <a:rPr lang="en-US" smtClean="0"/>
+              <a:rPr lang="en-US"/>
               <a:t>Click to edit Master text styles</a:t>
             </a:r>
           </a:p>
           <a:p>
             <a:pPr lvl="1"/>
             <a:r>
-              <a:rPr lang="en-US" smtClean="0"/>
+              <a:rPr lang="en-US"/>
               <a:t>Second level</a:t>
             </a:r>
           </a:p>
           <a:p>
             <a:pPr lvl="2"/>
             <a:r>
-              <a:rPr lang="en-US" smtClean="0"/>
+              <a:rPr lang="en-US"/>
               <a:t>Third level</a:t>
             </a:r>
           </a:p>
           <a:p>
             <a:pPr lvl="3"/>
             <a:r>
-              <a:rPr lang="en-US" smtClean="0"/>
+              <a:rPr lang="en-US"/>
               <a:t>Fourth level</a:t>
             </a:r>
           </a:p>
           <a:p>
             <a:pPr lvl="4"/>
             <a:r>
-              <a:rPr lang="en-US" smtClean="0"/>
+              <a:rPr lang="en-US"/>
               <a:t>Fifth level</a:t>
             </a:r>
-            <a:endParaRPr lang="en-US"/>
           </a:p>
         </p:txBody>
       </p:sp>
@@ -650,7 +660,7 @@
             <a:fld id="{1D8BD707-D9CF-40AE-B4C6-C98DA3205C09}" type="datetimeFigureOut">
               <a:rPr lang="en-US" smtClean="0"/>
               <a:pPr/>
-              <a:t>8/1/2011</a:t>
+              <a:t>10/31/2025</a:t>
             </a:fld>
             <a:endParaRPr lang="en-US"/>
           </a:p>
@@ -693,7 +703,7 @@
             <a:fld id="{B6F15528-21DE-4FAA-801E-634DDDAF4B2B}" type="slidenum">
               <a:rPr lang="en-US" smtClean="0"/>
               <a:pPr/>
-              <a:t>‹#›</a:t>
+              <a:t>‹N°›</a:t>
             </a:fld>
             <a:endParaRPr lang="en-US"/>
           </a:p>
@@ -740,10 +750,9 @@
           <a:lstStyle/>
           <a:p>
             <a:r>
-              <a:rPr lang="en-US" smtClean="0"/>
+              <a:rPr lang="en-US"/>
               <a:t>Click to edit Master title style</a:t>
             </a:r>
-            <a:endParaRPr lang="en-US"/>
           </a:p>
         </p:txBody>
       </p:sp>
@@ -764,38 +773,37 @@
           <a:p>
             <a:pPr lvl="0"/>
             <a:r>
-              <a:rPr lang="en-US" smtClean="0"/>
+              <a:rPr lang="en-US"/>
               <a:t>Click to edit Master text styles</a:t>
             </a:r>
           </a:p>
           <a:p>
             <a:pPr lvl="1"/>
             <a:r>
-              <a:rPr lang="en-US" smtClean="0"/>
+              <a:rPr lang="en-US"/>
               <a:t>Second level</a:t>
             </a:r>
           </a:p>
           <a:p>
             <a:pPr lvl="2"/>
             <a:r>
-              <a:rPr lang="en-US" smtClean="0"/>
+              <a:rPr lang="en-US"/>
               <a:t>Third level</a:t>
             </a:r>
           </a:p>
           <a:p>
             <a:pPr lvl="3"/>
             <a:r>
-              <a:rPr lang="en-US" smtClean="0"/>
+              <a:rPr lang="en-US"/>
               <a:t>Fourth level</a:t>
             </a:r>
           </a:p>
           <a:p>
             <a:pPr lvl="4"/>
             <a:r>
-              <a:rPr lang="en-US" smtClean="0"/>
+              <a:rPr lang="en-US"/>
               <a:t>Fifth level</a:t>
             </a:r>
-            <a:endParaRPr lang="en-US"/>
           </a:p>
         </p:txBody>
       </p:sp>
@@ -817,7 +825,7 @@
             <a:fld id="{1D8BD707-D9CF-40AE-B4C6-C98DA3205C09}" type="datetimeFigureOut">
               <a:rPr lang="en-US" smtClean="0"/>
               <a:pPr/>
-              <a:t>8/1/2011</a:t>
+              <a:t>10/31/2025</a:t>
             </a:fld>
             <a:endParaRPr lang="en-US"/>
           </a:p>
@@ -860,7 +868,7 @@
             <a:fld id="{B6F15528-21DE-4FAA-801E-634DDDAF4B2B}" type="slidenum">
               <a:rPr lang="en-US" smtClean="0"/>
               <a:pPr/>
-              <a:t>‹#›</a:t>
+              <a:t>‹N°›</a:t>
             </a:fld>
             <a:endParaRPr lang="en-US"/>
           </a:p>
@@ -916,10 +924,9 @@
           </a:lstStyle>
           <a:p>
             <a:r>
-              <a:rPr lang="en-US" smtClean="0"/>
+              <a:rPr lang="en-US"/>
               <a:t>Click to edit Master title style</a:t>
             </a:r>
-            <a:endParaRPr lang="en-US"/>
           </a:p>
         </p:txBody>
       </p:sp>
@@ -1036,7 +1043,7 @@
           <a:p>
             <a:pPr lvl="0"/>
             <a:r>
-              <a:rPr lang="en-US" smtClean="0"/>
+              <a:rPr lang="en-US"/>
               <a:t>Click to edit Master text styles</a:t>
             </a:r>
           </a:p>
@@ -1060,7 +1067,7 @@
             <a:fld id="{1D8BD707-D9CF-40AE-B4C6-C98DA3205C09}" type="datetimeFigureOut">
               <a:rPr lang="en-US" smtClean="0"/>
               <a:pPr/>
-              <a:t>8/1/2011</a:t>
+              <a:t>10/31/2025</a:t>
             </a:fld>
             <a:endParaRPr lang="en-US"/>
           </a:p>
@@ -1103,7 +1110,7 @@
             <a:fld id="{B6F15528-21DE-4FAA-801E-634DDDAF4B2B}" type="slidenum">
               <a:rPr lang="en-US" smtClean="0"/>
               <a:pPr/>
-              <a:t>‹#›</a:t>
+              <a:t>‹N°›</a:t>
             </a:fld>
             <a:endParaRPr lang="en-US"/>
           </a:p>
@@ -1150,10 +1157,9 @@
           <a:lstStyle/>
           <a:p>
             <a:r>
-              <a:rPr lang="en-US" smtClean="0"/>
+              <a:rPr lang="en-US"/>
               <a:t>Click to edit Master title style</a:t>
             </a:r>
-            <a:endParaRPr lang="en-US"/>
           </a:p>
         </p:txBody>
       </p:sp>
@@ -1207,38 +1213,37 @@
           <a:p>
             <a:pPr lvl="0"/>
             <a:r>
-              <a:rPr lang="en-US" smtClean="0"/>
+              <a:rPr lang="en-US"/>
               <a:t>Click to edit Master text styles</a:t>
             </a:r>
           </a:p>
           <a:p>
             <a:pPr lvl="1"/>
             <a:r>
-              <a:rPr lang="en-US" smtClean="0"/>
+              <a:rPr lang="en-US"/>
               <a:t>Second level</a:t>
             </a:r>
           </a:p>
           <a:p>
             <a:pPr lvl="2"/>
             <a:r>
-              <a:rPr lang="en-US" smtClean="0"/>
+              <a:rPr lang="en-US"/>
               <a:t>Third level</a:t>
             </a:r>
           </a:p>
           <a:p>
             <a:pPr lvl="3"/>
             <a:r>
-              <a:rPr lang="en-US" smtClean="0"/>
+              <a:rPr lang="en-US"/>
               <a:t>Fourth level</a:t>
             </a:r>
           </a:p>
           <a:p>
             <a:pPr lvl="4"/>
             <a:r>
-              <a:rPr lang="en-US" smtClean="0"/>
+              <a:rPr lang="en-US"/>
               <a:t>Fifth level</a:t>
             </a:r>
-            <a:endParaRPr lang="en-US"/>
           </a:p>
         </p:txBody>
       </p:sp>
@@ -1292,38 +1297,37 @@
           <a:p>
             <a:pPr lvl="0"/>
             <a:r>
-              <a:rPr lang="en-US" smtClean="0"/>
+              <a:rPr lang="en-US"/>
               <a:t>Click to edit Master text styles</a:t>
             </a:r>
           </a:p>
           <a:p>
             <a:pPr lvl="1"/>
             <a:r>
-              <a:rPr lang="en-US" smtClean="0"/>
+              <a:rPr lang="en-US"/>
               <a:t>Second level</a:t>
             </a:r>
           </a:p>
           <a:p>
             <a:pPr lvl="2"/>
             <a:r>
-              <a:rPr lang="en-US" smtClean="0"/>
+              <a:rPr lang="en-US"/>
               <a:t>Third level</a:t>
             </a:r>
           </a:p>
           <a:p>
             <a:pPr lvl="3"/>
             <a:r>
-              <a:rPr lang="en-US" smtClean="0"/>
+              <a:rPr lang="en-US"/>
               <a:t>Fourth level</a:t>
             </a:r>
           </a:p>
           <a:p>
             <a:pPr lvl="4"/>
             <a:r>
-              <a:rPr lang="en-US" smtClean="0"/>
+              <a:rPr lang="en-US"/>
               <a:t>Fifth level</a:t>
             </a:r>
-            <a:endParaRPr lang="en-US"/>
           </a:p>
         </p:txBody>
       </p:sp>
@@ -1345,7 +1349,7 @@
             <a:fld id="{1D8BD707-D9CF-40AE-B4C6-C98DA3205C09}" type="datetimeFigureOut">
               <a:rPr lang="en-US" smtClean="0"/>
               <a:pPr/>
-              <a:t>8/1/2011</a:t>
+              <a:t>10/31/2025</a:t>
             </a:fld>
             <a:endParaRPr lang="en-US"/>
           </a:p>
@@ -1388,7 +1392,7 @@
             <a:fld id="{B6F15528-21DE-4FAA-801E-634DDDAF4B2B}" type="slidenum">
               <a:rPr lang="en-US" smtClean="0"/>
               <a:pPr/>
-              <a:t>‹#›</a:t>
+              <a:t>‹N°›</a:t>
             </a:fld>
             <a:endParaRPr lang="en-US"/>
           </a:p>
@@ -1439,10 +1443,9 @@
           </a:lstStyle>
           <a:p>
             <a:r>
-              <a:rPr lang="en-US" smtClean="0"/>
+              <a:rPr lang="en-US"/>
               <a:t>Click to edit Master title style</a:t>
             </a:r>
-            <a:endParaRPr lang="en-US"/>
           </a:p>
         </p:txBody>
       </p:sp>
@@ -1505,7 +1508,7 @@
           <a:p>
             <a:pPr lvl="0"/>
             <a:r>
-              <a:rPr lang="en-US" smtClean="0"/>
+              <a:rPr lang="en-US"/>
               <a:t>Click to edit Master text styles</a:t>
             </a:r>
           </a:p>
@@ -1561,38 +1564,37 @@
           <a:p>
             <a:pPr lvl="0"/>
             <a:r>
-              <a:rPr lang="en-US" smtClean="0"/>
+              <a:rPr lang="en-US"/>
               <a:t>Click to edit Master text styles</a:t>
             </a:r>
           </a:p>
           <a:p>
             <a:pPr lvl="1"/>
             <a:r>
-              <a:rPr lang="en-US" smtClean="0"/>
+              <a:rPr lang="en-US"/>
               <a:t>Second level</a:t>
             </a:r>
           </a:p>
           <a:p>
             <a:pPr lvl="2"/>
             <a:r>
-              <a:rPr lang="en-US" smtClean="0"/>
+              <a:rPr lang="en-US"/>
               <a:t>Third level</a:t>
             </a:r>
           </a:p>
           <a:p>
             <a:pPr lvl="3"/>
             <a:r>
-              <a:rPr lang="en-US" smtClean="0"/>
+              <a:rPr lang="en-US"/>
               <a:t>Fourth level</a:t>
             </a:r>
           </a:p>
           <a:p>
             <a:pPr lvl="4"/>
             <a:r>
-              <a:rPr lang="en-US" smtClean="0"/>
+              <a:rPr lang="en-US"/>
               <a:t>Fifth level</a:t>
             </a:r>
-            <a:endParaRPr lang="en-US"/>
           </a:p>
         </p:txBody>
       </p:sp>
@@ -1655,7 +1657,7 @@
           <a:p>
             <a:pPr lvl="0"/>
             <a:r>
-              <a:rPr lang="en-US" smtClean="0"/>
+              <a:rPr lang="en-US"/>
               <a:t>Click to edit Master text styles</a:t>
             </a:r>
           </a:p>
@@ -1711,38 +1713,37 @@
           <a:p>
             <a:pPr lvl="0"/>
             <a:r>
-              <a:rPr lang="en-US" smtClean="0"/>
+              <a:rPr lang="en-US"/>
               <a:t>Click to edit Master text styles</a:t>
             </a:r>
           </a:p>
           <a:p>
             <a:pPr lvl="1"/>
             <a:r>
-              <a:rPr lang="en-US" smtClean="0"/>
+              <a:rPr lang="en-US"/>
               <a:t>Second level</a:t>
             </a:r>
           </a:p>
           <a:p>
             <a:pPr lvl="2"/>
             <a:r>
-              <a:rPr lang="en-US" smtClean="0"/>
+              <a:rPr lang="en-US"/>
               <a:t>Third level</a:t>
             </a:r>
           </a:p>
           <a:p>
             <a:pPr lvl="3"/>
             <a:r>
-              <a:rPr lang="en-US" smtClean="0"/>
+              <a:rPr lang="en-US"/>
               <a:t>Fourth level</a:t>
             </a:r>
           </a:p>
           <a:p>
             <a:pPr lvl="4"/>
             <a:r>
-              <a:rPr lang="en-US" smtClean="0"/>
+              <a:rPr lang="en-US"/>
               <a:t>Fifth level</a:t>
             </a:r>
-            <a:endParaRPr lang="en-US"/>
           </a:p>
         </p:txBody>
       </p:sp>
@@ -1764,7 +1765,7 @@
             <a:fld id="{1D8BD707-D9CF-40AE-B4C6-C98DA3205C09}" type="datetimeFigureOut">
               <a:rPr lang="en-US" smtClean="0"/>
               <a:pPr/>
-              <a:t>8/1/2011</a:t>
+              <a:t>10/31/2025</a:t>
             </a:fld>
             <a:endParaRPr lang="en-US"/>
           </a:p>
@@ -1807,7 +1808,7 @@
             <a:fld id="{B6F15528-21DE-4FAA-801E-634DDDAF4B2B}" type="slidenum">
               <a:rPr lang="en-US" smtClean="0"/>
               <a:pPr/>
-              <a:t>‹#›</a:t>
+              <a:t>‹N°›</a:t>
             </a:fld>
             <a:endParaRPr lang="en-US"/>
           </a:p>
@@ -1854,10 +1855,9 @@
           <a:lstStyle/>
           <a:p>
             <a:r>
-              <a:rPr lang="en-US" smtClean="0"/>
+              <a:rPr lang="en-US"/>
               <a:t>Click to edit Master title style</a:t>
             </a:r>
-            <a:endParaRPr lang="en-US"/>
           </a:p>
         </p:txBody>
       </p:sp>
@@ -1879,7 +1879,7 @@
             <a:fld id="{1D8BD707-D9CF-40AE-B4C6-C98DA3205C09}" type="datetimeFigureOut">
               <a:rPr lang="en-US" smtClean="0"/>
               <a:pPr/>
-              <a:t>8/1/2011</a:t>
+              <a:t>10/31/2025</a:t>
             </a:fld>
             <a:endParaRPr lang="en-US"/>
           </a:p>
@@ -1922,7 +1922,7 @@
             <a:fld id="{B6F15528-21DE-4FAA-801E-634DDDAF4B2B}" type="slidenum">
               <a:rPr lang="en-US" smtClean="0"/>
               <a:pPr/>
-              <a:t>‹#›</a:t>
+              <a:t>‹N°›</a:t>
             </a:fld>
             <a:endParaRPr lang="en-US"/>
           </a:p>
@@ -1971,7 +1971,7 @@
             <a:fld id="{1D8BD707-D9CF-40AE-B4C6-C98DA3205C09}" type="datetimeFigureOut">
               <a:rPr lang="en-US" smtClean="0"/>
               <a:pPr/>
-              <a:t>8/1/2011</a:t>
+              <a:t>10/31/2025</a:t>
             </a:fld>
             <a:endParaRPr lang="en-US"/>
           </a:p>
@@ -2014,7 +2014,7 @@
             <a:fld id="{B6F15528-21DE-4FAA-801E-634DDDAF4B2B}" type="slidenum">
               <a:rPr lang="en-US" smtClean="0"/>
               <a:pPr/>
-              <a:t>‹#›</a:t>
+              <a:t>‹N°›</a:t>
             </a:fld>
             <a:endParaRPr lang="en-US"/>
           </a:p>
@@ -2070,10 +2070,9 @@
           </a:lstStyle>
           <a:p>
             <a:r>
-              <a:rPr lang="en-US" smtClean="0"/>
+              <a:rPr lang="en-US"/>
               <a:t>Click to edit Master title style</a:t>
             </a:r>
-            <a:endParaRPr lang="en-US"/>
           </a:p>
         </p:txBody>
       </p:sp>
@@ -2127,38 +2126,37 @@
           <a:p>
             <a:pPr lvl="0"/>
             <a:r>
-              <a:rPr lang="en-US" smtClean="0"/>
+              <a:rPr lang="en-US"/>
               <a:t>Click to edit Master text styles</a:t>
             </a:r>
           </a:p>
           <a:p>
             <a:pPr lvl="1"/>
             <a:r>
-              <a:rPr lang="en-US" smtClean="0"/>
+              <a:rPr lang="en-US"/>
               <a:t>Second level</a:t>
             </a:r>
           </a:p>
           <a:p>
             <a:pPr lvl="2"/>
             <a:r>
-              <a:rPr lang="en-US" smtClean="0"/>
+              <a:rPr lang="en-US"/>
               <a:t>Third level</a:t>
             </a:r>
           </a:p>
           <a:p>
             <a:pPr lvl="3"/>
             <a:r>
-              <a:rPr lang="en-US" smtClean="0"/>
+              <a:rPr lang="en-US"/>
               <a:t>Fourth level</a:t>
             </a:r>
           </a:p>
           <a:p>
             <a:pPr lvl="4"/>
             <a:r>
-              <a:rPr lang="en-US" smtClean="0"/>
+              <a:rPr lang="en-US"/>
               <a:t>Fifth level</a:t>
             </a:r>
-            <a:endParaRPr lang="en-US"/>
           </a:p>
         </p:txBody>
       </p:sp>
@@ -2221,7 +2219,7 @@
           <a:p>
             <a:pPr lvl="0"/>
             <a:r>
-              <a:rPr lang="en-US" smtClean="0"/>
+              <a:rPr lang="en-US"/>
               <a:t>Click to edit Master text styles</a:t>
             </a:r>
           </a:p>
@@ -2245,7 +2243,7 @@
             <a:fld id="{1D8BD707-D9CF-40AE-B4C6-C98DA3205C09}" type="datetimeFigureOut">
               <a:rPr lang="en-US" smtClean="0"/>
               <a:pPr/>
-              <a:t>8/1/2011</a:t>
+              <a:t>10/31/2025</a:t>
             </a:fld>
             <a:endParaRPr lang="en-US"/>
           </a:p>
@@ -2288,7 +2286,7 @@
             <a:fld id="{B6F15528-21DE-4FAA-801E-634DDDAF4B2B}" type="slidenum">
               <a:rPr lang="en-US" smtClean="0"/>
               <a:pPr/>
-              <a:t>‹#›</a:t>
+              <a:t>‹N°›</a:t>
             </a:fld>
             <a:endParaRPr lang="en-US"/>
           </a:p>
@@ -2344,10 +2342,9 @@
           </a:lstStyle>
           <a:p>
             <a:r>
-              <a:rPr lang="en-US" smtClean="0"/>
+              <a:rPr lang="en-US"/>
               <a:t>Click to edit Master title style</a:t>
             </a:r>
-            <a:endParaRPr lang="en-US"/>
           </a:p>
         </p:txBody>
       </p:sp>
@@ -2471,7 +2468,7 @@
           <a:p>
             <a:pPr lvl="0"/>
             <a:r>
-              <a:rPr lang="en-US" smtClean="0"/>
+              <a:rPr lang="en-US"/>
               <a:t>Click to edit Master text styles</a:t>
             </a:r>
           </a:p>
@@ -2495,7 +2492,7 @@
             <a:fld id="{1D8BD707-D9CF-40AE-B4C6-C98DA3205C09}" type="datetimeFigureOut">
               <a:rPr lang="en-US" smtClean="0"/>
               <a:pPr/>
-              <a:t>8/1/2011</a:t>
+              <a:t>10/31/2025</a:t>
             </a:fld>
             <a:endParaRPr lang="en-US"/>
           </a:p>
@@ -2538,7 +2535,7 @@
             <a:fld id="{B6F15528-21DE-4FAA-801E-634DDDAF4B2B}" type="slidenum">
               <a:rPr lang="en-US" smtClean="0"/>
               <a:pPr/>
-              <a:t>‹#›</a:t>
+              <a:t>‹N°›</a:t>
             </a:fld>
             <a:endParaRPr lang="en-US"/>
           </a:p>
@@ -2600,10 +2597,9 @@
           <a:lstStyle/>
           <a:p>
             <a:r>
-              <a:rPr lang="en-US" smtClean="0"/>
+              <a:rPr lang="en-US"/>
               <a:t>Click to edit Master title style</a:t>
             </a:r>
-            <a:endParaRPr lang="en-US"/>
           </a:p>
         </p:txBody>
       </p:sp>
@@ -2634,38 +2630,37 @@
           <a:p>
             <a:pPr lvl="0"/>
             <a:r>
-              <a:rPr lang="en-US" smtClean="0"/>
+              <a:rPr lang="en-US"/>
               <a:t>Click to edit Master text styles</a:t>
             </a:r>
           </a:p>
           <a:p>
             <a:pPr lvl="1"/>
             <a:r>
-              <a:rPr lang="en-US" smtClean="0"/>
+              <a:rPr lang="en-US"/>
               <a:t>Second level</a:t>
             </a:r>
           </a:p>
           <a:p>
             <a:pPr lvl="2"/>
             <a:r>
-              <a:rPr lang="en-US" smtClean="0"/>
+              <a:rPr lang="en-US"/>
               <a:t>Third level</a:t>
             </a:r>
           </a:p>
           <a:p>
             <a:pPr lvl="3"/>
             <a:r>
-              <a:rPr lang="en-US" smtClean="0"/>
+              <a:rPr lang="en-US"/>
               <a:t>Fourth level</a:t>
             </a:r>
           </a:p>
           <a:p>
             <a:pPr lvl="4"/>
             <a:r>
-              <a:rPr lang="en-US" smtClean="0"/>
+              <a:rPr lang="en-US"/>
               <a:t>Fifth level</a:t>
             </a:r>
-            <a:endParaRPr lang="en-US"/>
           </a:p>
         </p:txBody>
       </p:sp>
@@ -2705,7 +2700,7 @@
             <a:fld id="{1D8BD707-D9CF-40AE-B4C6-C98DA3205C09}" type="datetimeFigureOut">
               <a:rPr lang="en-US" smtClean="0"/>
               <a:pPr/>
-              <a:t>8/1/2011</a:t>
+              <a:t>10/31/2025</a:t>
             </a:fld>
             <a:endParaRPr lang="en-US"/>
           </a:p>
@@ -2784,7 +2779,7 @@
             <a:fld id="{B6F15528-21DE-4FAA-801E-634DDDAF4B2B}" type="slidenum">
               <a:rPr lang="en-US" smtClean="0"/>
               <a:pPr/>
-              <a:t>‹#›</a:t>
+              <a:t>‹N°›</a:t>
             </a:fld>
             <a:endParaRPr lang="en-US"/>
           </a:p>
@@ -3060,7 +3055,7 @@
 </file>
 
 <file path=ppt/slides/slide1.xml><?xml version="1.0" encoding="utf-8"?>
-<p:sld xmlns:p="http://schemas.openxmlformats.org/presentationml/2006/main" xmlns:a="http://schemas.openxmlformats.org/drawingml/2006/main" xmlns:r="http://schemas.openxmlformats.org/officeDocument/2006/relationships">
+<p:sld xmlns:a="http://schemas.openxmlformats.org/drawingml/2006/main" xmlns:r="http://schemas.openxmlformats.org/officeDocument/2006/relationships" xmlns:p="http://schemas.openxmlformats.org/presentationml/2006/main">
   <p:cSld>
     <p:spTree>
       <p:nvGrpSpPr>
@@ -3078,12 +3073,12 @@
       </p:grpSpPr>
       <p:sp>
         <p:nvSpPr>
-          <p:cNvPr name="Freeform 2" id="2"/>
+          <p:cNvPr id="2" name="Freeform 2"/>
           <p:cNvSpPr/>
           <p:nvPr/>
         </p:nvSpPr>
         <p:spPr>
-          <a:xfrm flipH="false" flipV="false" rot="0">
+          <a:xfrm>
             <a:off x="0" y="0"/>
             <a:ext cx="18288000" cy="10287000"/>
           </a:xfrm>
@@ -3092,9 +3087,9 @@
             <a:gdLst/>
             <a:ahLst/>
             <a:cxnLst/>
-            <a:rect r="r" b="b" t="t" l="l"/>
+            <a:rect l="l" t="t" r="r" b="b"/>
             <a:pathLst>
-              <a:path h="10287000" w="18288000">
+              <a:path w="18288000" h="10287000">
                 <a:moveTo>
                   <a:pt x="0" y="0"/>
                 </a:moveTo>
@@ -3117,19 +3112,26 @@
           <a:blipFill>
             <a:blip r:embed="rId2"/>
             <a:stretch>
-              <a:fillRect l="0" t="-9222" r="0" b="-9222"/>
+              <a:fillRect t="-9222" b="-9222"/>
             </a:stretch>
           </a:blipFill>
         </p:spPr>
+        <p:txBody>
+          <a:bodyPr/>
+          <a:lstStyle/>
+          <a:p>
+            <a:endParaRPr lang="fr-FR"/>
+          </a:p>
+        </p:txBody>
       </p:sp>
       <p:grpSp>
         <p:nvGrpSpPr>
-          <p:cNvPr name="Group 3" id="3"/>
+          <p:cNvPr id="3" name="Group 3"/>
           <p:cNvGrpSpPr/>
           <p:nvPr/>
         </p:nvGrpSpPr>
         <p:grpSpPr>
-          <a:xfrm rot="0">
+          <a:xfrm>
             <a:off x="1028700" y="0"/>
             <a:ext cx="7994211" cy="10532904"/>
             <a:chOff x="0" y="0"/>
@@ -3138,7 +3140,7 @@
         </p:grpSpPr>
         <p:sp>
           <p:nvSpPr>
-            <p:cNvPr name="Freeform 4" id="4">
+            <p:cNvPr id="4" name="Freeform 4">
               <a:extLst>
                 <a:ext uri="{C183D7F6-B498-43B3-948B-1728B52AA6E4}">
                   <adec:decorative xmlns:adec="http://schemas.microsoft.com/office/drawing/2017/decorative" val="1"/>
@@ -3149,7 +3151,7 @@
             <p:nvPr/>
           </p:nvSpPr>
           <p:spPr>
-            <a:xfrm flipH="false" flipV="false" rot="0">
+            <a:xfrm>
               <a:off x="0" y="0"/>
               <a:ext cx="2704214" cy="3562983"/>
             </a:xfrm>
@@ -3158,9 +3160,9 @@
               <a:gdLst/>
               <a:ahLst/>
               <a:cxnLst/>
-              <a:rect r="r" b="b" t="t" l="l"/>
+              <a:rect l="l" t="t" r="r" b="b"/>
               <a:pathLst>
-                <a:path h="3562983" w="2704214">
+                <a:path w="2704214" h="3562983">
                   <a:moveTo>
                     <a:pt x="0" y="0"/>
                   </a:moveTo>
@@ -3181,16 +3183,23 @@
               <a:srgbClr val="266041"/>
             </a:solidFill>
           </p:spPr>
+          <p:txBody>
+            <a:bodyPr/>
+            <a:lstStyle/>
+            <a:p>
+              <a:endParaRPr lang="fr-FR"/>
+            </a:p>
+          </p:txBody>
         </p:sp>
       </p:grpSp>
       <p:sp>
         <p:nvSpPr>
-          <p:cNvPr name="Freeform 5" id="5"/>
+          <p:cNvPr id="5" name="Freeform 5"/>
           <p:cNvSpPr/>
           <p:nvPr/>
         </p:nvSpPr>
         <p:spPr>
-          <a:xfrm flipH="false" flipV="false" rot="0">
+          <a:xfrm>
             <a:off x="1773663" y="1028700"/>
             <a:ext cx="744963" cy="744963"/>
           </a:xfrm>
@@ -3199,9 +3208,9 @@
             <a:gdLst/>
             <a:ahLst/>
             <a:cxnLst/>
-            <a:rect r="r" b="b" t="t" l="l"/>
+            <a:rect l="l" t="t" r="r" b="b"/>
             <a:pathLst>
-              <a:path h="744963" w="744963">
+              <a:path w="744963" h="744963">
                 <a:moveTo>
                   <a:pt x="0" y="0"/>
                 </a:moveTo>
@@ -3230,19 +3239,26 @@
               </a:extLst>
             </a:blip>
             <a:stretch>
-              <a:fillRect l="0" t="0" r="0" b="0"/>
+              <a:fillRect/>
             </a:stretch>
           </a:blipFill>
         </p:spPr>
-      </p:sp>
-      <p:sp>
-        <p:nvSpPr>
-          <p:cNvPr name="TextBox 6" id="6"/>
-          <p:cNvSpPr txBox="true"/>
+        <p:txBody>
+          <a:bodyPr/>
+          <a:lstStyle/>
+          <a:p>
+            <a:endParaRPr lang="fr-FR"/>
+          </a:p>
+        </p:txBody>
+      </p:sp>
+      <p:sp>
+        <p:nvSpPr>
+          <p:cNvPr id="6" name="TextBox 6"/>
+          <p:cNvSpPr txBox="1"/>
           <p:nvPr/>
         </p:nvSpPr>
         <p:spPr>
-          <a:xfrm rot="0">
+          <a:xfrm>
             <a:off x="2682348" y="1200172"/>
             <a:ext cx="2600489" cy="422231"/>
           </a:xfrm>
@@ -3251,7 +3267,7 @@
           </a:prstGeom>
         </p:spPr>
         <p:txBody>
-          <a:bodyPr anchor="t" rtlCol="false" tIns="0" lIns="0" bIns="0" rIns="0">
+          <a:bodyPr lIns="0" tIns="0" rIns="0" bIns="0" rtlCol="0" anchor="t">
             <a:spAutoFit/>
           </a:bodyPr>
           <a:lstStyle/>
@@ -3278,12 +3294,12 @@
       </p:sp>
       <p:sp>
         <p:nvSpPr>
-          <p:cNvPr name="TextBox 7" id="7"/>
-          <p:cNvSpPr txBox="true"/>
+          <p:cNvPr id="7" name="TextBox 7"/>
+          <p:cNvSpPr txBox="1"/>
           <p:nvPr/>
         </p:nvSpPr>
         <p:spPr>
-          <a:xfrm rot="0">
+          <a:xfrm>
             <a:off x="1535056" y="4704083"/>
             <a:ext cx="6981498" cy="1633322"/>
           </a:xfrm>
@@ -3292,7 +3308,7 @@
           </a:prstGeom>
         </p:spPr>
         <p:txBody>
-          <a:bodyPr anchor="t" rtlCol="false" tIns="0" lIns="0" bIns="0" rIns="0">
+          <a:bodyPr lIns="0" tIns="0" rIns="0" bIns="0" rtlCol="0" anchor="t">
             <a:spAutoFit/>
           </a:bodyPr>
           <a:lstStyle/>
@@ -3303,7 +3319,7 @@
               </a:lnSpc>
             </a:pPr>
             <a:r>
-              <a:rPr lang="en-US" sz="9547" b="true">
+              <a:rPr lang="en-US" sz="9547" b="1">
                 <a:solidFill>
                   <a:srgbClr val="FFFFFF"/>
                 </a:solidFill>
@@ -3319,12 +3335,12 @@
       </p:sp>
       <p:sp>
         <p:nvSpPr>
-          <p:cNvPr name="TextBox 8" id="8"/>
-          <p:cNvSpPr txBox="true"/>
+          <p:cNvPr id="8" name="TextBox 8"/>
+          <p:cNvSpPr txBox="1"/>
           <p:nvPr/>
         </p:nvSpPr>
         <p:spPr>
-          <a:xfrm rot="0">
+          <a:xfrm>
             <a:off x="1573156" y="3854345"/>
             <a:ext cx="2011608" cy="865481"/>
           </a:xfrm>
@@ -3333,7 +3349,7 @@
           </a:prstGeom>
         </p:spPr>
         <p:txBody>
-          <a:bodyPr anchor="t" rtlCol="false" tIns="0" lIns="0" bIns="0" rIns="0">
+          <a:bodyPr lIns="0" tIns="0" rIns="0" bIns="0" rtlCol="0" anchor="t">
             <a:spAutoFit/>
           </a:bodyPr>
           <a:lstStyle/>
@@ -3363,12 +3379,12 @@
       </p:sp>
       <p:sp>
         <p:nvSpPr>
-          <p:cNvPr name="TextBox 9" id="9"/>
-          <p:cNvSpPr txBox="true"/>
+          <p:cNvPr id="9" name="TextBox 9"/>
+          <p:cNvSpPr txBox="1"/>
           <p:nvPr/>
         </p:nvSpPr>
         <p:spPr>
-          <a:xfrm rot="0">
+          <a:xfrm>
             <a:off x="1773663" y="8623405"/>
             <a:ext cx="4405564" cy="1033218"/>
           </a:xfrm>
@@ -3377,7 +3393,7 @@
           </a:prstGeom>
         </p:spPr>
         <p:txBody>
-          <a:bodyPr anchor="t" rtlCol="false" tIns="0" lIns="0" bIns="0" rIns="0">
+          <a:bodyPr lIns="0" tIns="0" rIns="0" bIns="0" rtlCol="0" anchor="t">
             <a:spAutoFit/>
           </a:bodyPr>
           <a:lstStyle/>
@@ -3420,7 +3436,7 @@
             </a:r>
           </a:p>
           <a:p>
-            <a:pPr algn="l" marL="0" indent="0" lvl="0">
+            <a:pPr marL="0" lvl="0" indent="0" algn="l">
               <a:lnSpc>
                 <a:spcPts val="2828"/>
               </a:lnSpc>
@@ -3452,7 +3468,7 @@
 </file>
 
 <file path=ppt/slides/slide2.xml><?xml version="1.0" encoding="utf-8"?>
-<p:sld xmlns:p="http://schemas.openxmlformats.org/presentationml/2006/main" xmlns:a="http://schemas.openxmlformats.org/drawingml/2006/main" xmlns:r="http://schemas.openxmlformats.org/officeDocument/2006/relationships">
+<p:sld xmlns:a="http://schemas.openxmlformats.org/drawingml/2006/main" xmlns:r="http://schemas.openxmlformats.org/officeDocument/2006/relationships" xmlns:p="http://schemas.openxmlformats.org/presentationml/2006/main">
   <p:cSld>
     <p:spTree>
       <p:nvGrpSpPr>
@@ -3470,12 +3486,12 @@
       </p:grpSpPr>
       <p:grpSp>
         <p:nvGrpSpPr>
-          <p:cNvPr name="Group 2" id="2"/>
+          <p:cNvPr id="2" name="Group 2"/>
           <p:cNvGrpSpPr/>
           <p:nvPr/>
         </p:nvGrpSpPr>
         <p:grpSpPr>
-          <a:xfrm rot="0">
+          <a:xfrm>
             <a:off x="0" y="7979322"/>
             <a:ext cx="18477077" cy="3342771"/>
             <a:chOff x="0" y="0"/>
@@ -3484,7 +3500,7 @@
         </p:grpSpPr>
         <p:sp>
           <p:nvSpPr>
-            <p:cNvPr name="Freeform 3" id="3">
+            <p:cNvPr id="3" name="Freeform 3">
               <a:extLst>
                 <a:ext uri="{C183D7F6-B498-43B3-948B-1728B52AA6E4}">
                   <adec:decorative xmlns:adec="http://schemas.microsoft.com/office/drawing/2017/decorative" val="1"/>
@@ -3495,7 +3511,7 @@
             <p:nvPr/>
           </p:nvSpPr>
           <p:spPr>
-            <a:xfrm flipH="false" flipV="false" rot="0">
+            <a:xfrm>
               <a:off x="0" y="0"/>
               <a:ext cx="8493842" cy="1536659"/>
             </a:xfrm>
@@ -3504,9 +3520,9 @@
               <a:gdLst/>
               <a:ahLst/>
               <a:cxnLst/>
-              <a:rect r="r" b="b" t="t" l="l"/>
+              <a:rect l="l" t="t" r="r" b="b"/>
               <a:pathLst>
-                <a:path h="1536659" w="8493842">
+                <a:path w="8493842" h="1536659">
                   <a:moveTo>
                     <a:pt x="0" y="0"/>
                   </a:moveTo>
@@ -3527,16 +3543,23 @@
               <a:srgbClr val="266041"/>
             </a:solidFill>
           </p:spPr>
+          <p:txBody>
+            <a:bodyPr/>
+            <a:lstStyle/>
+            <a:p>
+              <a:endParaRPr lang="fr-FR"/>
+            </a:p>
+          </p:txBody>
         </p:sp>
       </p:grpSp>
       <p:sp>
         <p:nvSpPr>
-          <p:cNvPr name="Freeform 4" id="4"/>
+          <p:cNvPr id="4" name="Freeform 4"/>
           <p:cNvSpPr/>
           <p:nvPr/>
         </p:nvSpPr>
         <p:spPr>
-          <a:xfrm flipH="false" flipV="false" rot="0">
+          <a:xfrm>
             <a:off x="2086317" y="242315"/>
             <a:ext cx="14304443" cy="3951602"/>
           </a:xfrm>
@@ -3545,9 +3568,9 @@
             <a:gdLst/>
             <a:ahLst/>
             <a:cxnLst/>
-            <a:rect r="r" b="b" t="t" l="l"/>
+            <a:rect l="l" t="t" r="r" b="b"/>
             <a:pathLst>
-              <a:path h="3951602" w="14304443">
+              <a:path w="14304443" h="3951602">
                 <a:moveTo>
                   <a:pt x="0" y="0"/>
                 </a:moveTo>
@@ -3570,19 +3593,26 @@
           <a:blipFill>
             <a:blip r:embed="rId2"/>
             <a:stretch>
-              <a:fillRect l="0" t="0" r="0" b="0"/>
+              <a:fillRect/>
             </a:stretch>
           </a:blipFill>
         </p:spPr>
-      </p:sp>
-      <p:sp>
-        <p:nvSpPr>
-          <p:cNvPr name="Freeform 5" id="5"/>
+        <p:txBody>
+          <a:bodyPr/>
+          <a:lstStyle/>
+          <a:p>
+            <a:endParaRPr lang="fr-FR"/>
+          </a:p>
+        </p:txBody>
+      </p:sp>
+      <p:sp>
+        <p:nvSpPr>
+          <p:cNvPr id="5" name="Freeform 5"/>
           <p:cNvSpPr/>
           <p:nvPr/>
         </p:nvSpPr>
         <p:spPr>
-          <a:xfrm flipH="false" flipV="false" rot="0">
+          <a:xfrm>
             <a:off x="2086317" y="4108192"/>
             <a:ext cx="14304443" cy="3844319"/>
           </a:xfrm>
@@ -3591,9 +3621,9 @@
             <a:gdLst/>
             <a:ahLst/>
             <a:cxnLst/>
-            <a:rect r="r" b="b" t="t" l="l"/>
+            <a:rect l="l" t="t" r="r" b="b"/>
             <a:pathLst>
-              <a:path h="3844319" w="14304443">
+              <a:path w="14304443" h="3844319">
                 <a:moveTo>
                   <a:pt x="0" y="0"/>
                 </a:moveTo>
@@ -3616,19 +3646,26 @@
           <a:blipFill>
             <a:blip r:embed="rId3"/>
             <a:stretch>
-              <a:fillRect l="0" t="0" r="0" b="0"/>
+              <a:fillRect/>
             </a:stretch>
           </a:blipFill>
         </p:spPr>
-      </p:sp>
-      <p:sp>
-        <p:nvSpPr>
-          <p:cNvPr name="TextBox 6" id="6"/>
-          <p:cNvSpPr txBox="true"/>
+        <p:txBody>
+          <a:bodyPr/>
+          <a:lstStyle/>
+          <a:p>
+            <a:endParaRPr lang="fr-FR"/>
+          </a:p>
+        </p:txBody>
+      </p:sp>
+      <p:sp>
+        <p:nvSpPr>
+          <p:cNvPr id="6" name="TextBox 6"/>
+          <p:cNvSpPr txBox="1"/>
           <p:nvPr/>
         </p:nvSpPr>
         <p:spPr>
-          <a:xfrm rot="0">
+          <a:xfrm>
             <a:off x="693866" y="8408123"/>
             <a:ext cx="4993523" cy="689019"/>
           </a:xfrm>
@@ -3637,7 +3674,7 @@
           </a:prstGeom>
         </p:spPr>
         <p:txBody>
-          <a:bodyPr anchor="t" rtlCol="false" tIns="0" lIns="0" bIns="0" rIns="0">
+          <a:bodyPr lIns="0" tIns="0" rIns="0" bIns="0" rtlCol="0" anchor="t">
             <a:spAutoFit/>
           </a:bodyPr>
           <a:lstStyle/>
@@ -3648,7 +3685,7 @@
               </a:lnSpc>
             </a:pPr>
             <a:r>
-              <a:rPr lang="en-US" sz="4000" b="true">
+              <a:rPr lang="en-US" sz="4000" b="1">
                 <a:solidFill>
                   <a:srgbClr val="FFFFFF"/>
                 </a:solidFill>
@@ -3664,12 +3701,12 @@
       </p:sp>
       <p:sp>
         <p:nvSpPr>
-          <p:cNvPr name="TextBox 7" id="7"/>
-          <p:cNvSpPr txBox="true"/>
+          <p:cNvPr id="7" name="TextBox 7"/>
+          <p:cNvSpPr txBox="1"/>
           <p:nvPr/>
         </p:nvSpPr>
         <p:spPr>
-          <a:xfrm rot="0">
+          <a:xfrm>
             <a:off x="722441" y="8162153"/>
             <a:ext cx="4993523" cy="350253"/>
           </a:xfrm>
@@ -3678,7 +3715,7 @@
           </a:prstGeom>
         </p:spPr>
         <p:txBody>
-          <a:bodyPr anchor="t" rtlCol="false" tIns="0" lIns="0" bIns="0" rIns="0">
+          <a:bodyPr lIns="0" tIns="0" rIns="0" bIns="0" rtlCol="0" anchor="t">
             <a:spAutoFit/>
           </a:bodyPr>
           <a:lstStyle/>
@@ -3708,12 +3745,12 @@
       </p:sp>
       <p:sp>
         <p:nvSpPr>
-          <p:cNvPr name="TextBox 8" id="8"/>
-          <p:cNvSpPr txBox="true"/>
+          <p:cNvPr id="8" name="TextBox 8"/>
+          <p:cNvSpPr txBox="1"/>
           <p:nvPr/>
         </p:nvSpPr>
         <p:spPr>
-          <a:xfrm rot="0">
+          <a:xfrm>
             <a:off x="693866" y="9158095"/>
             <a:ext cx="13842807" cy="274304"/>
           </a:xfrm>
@@ -3722,12 +3759,12 @@
           </a:prstGeom>
         </p:spPr>
         <p:txBody>
-          <a:bodyPr anchor="t" rtlCol="false" tIns="0" lIns="0" bIns="0" rIns="0">
+          <a:bodyPr lIns="0" tIns="0" rIns="0" bIns="0" rtlCol="0" anchor="t">
             <a:spAutoFit/>
           </a:bodyPr>
           <a:lstStyle/>
           <a:p>
-            <a:pPr algn="l" marL="0" indent="0" lvl="0">
+            <a:pPr marL="0" lvl="0" indent="0" algn="l">
               <a:lnSpc>
                 <a:spcPts val="2208"/>
               </a:lnSpc>
@@ -3752,12 +3789,12 @@
       </p:sp>
       <p:sp>
         <p:nvSpPr>
-          <p:cNvPr name="TextBox 9" id="9"/>
-          <p:cNvSpPr txBox="true"/>
+          <p:cNvPr id="9" name="TextBox 9"/>
+          <p:cNvSpPr txBox="1"/>
           <p:nvPr/>
         </p:nvSpPr>
         <p:spPr>
-          <a:xfrm rot="0">
+          <a:xfrm>
             <a:off x="684341" y="9499074"/>
             <a:ext cx="17217250" cy="550573"/>
           </a:xfrm>
@@ -3766,12 +3803,12 @@
           </a:prstGeom>
         </p:spPr>
         <p:txBody>
-          <a:bodyPr anchor="t" rtlCol="false" tIns="0" lIns="0" bIns="0" rIns="0">
+          <a:bodyPr lIns="0" tIns="0" rIns="0" bIns="0" rtlCol="0" anchor="t">
             <a:spAutoFit/>
           </a:bodyPr>
           <a:lstStyle/>
           <a:p>
-            <a:pPr algn="l" marL="0" indent="0" lvl="0">
+            <a:pPr marL="0" lvl="0" indent="0" algn="l">
               <a:lnSpc>
                 <a:spcPts val="2208"/>
               </a:lnSpc>
@@ -3803,7 +3840,7 @@
 </file>
 
 <file path=ppt/slides/slide3.xml><?xml version="1.0" encoding="utf-8"?>
-<p:sld xmlns:p="http://schemas.openxmlformats.org/presentationml/2006/main" xmlns:a="http://schemas.openxmlformats.org/drawingml/2006/main" xmlns:r="http://schemas.openxmlformats.org/officeDocument/2006/relationships">
+<p:sld xmlns:a="http://schemas.openxmlformats.org/drawingml/2006/main" xmlns:r="http://schemas.openxmlformats.org/officeDocument/2006/relationships" xmlns:p="http://schemas.openxmlformats.org/presentationml/2006/main">
   <p:cSld>
     <p:spTree>
       <p:nvGrpSpPr>
@@ -3821,12 +3858,12 @@
       </p:grpSpPr>
       <p:grpSp>
         <p:nvGrpSpPr>
-          <p:cNvPr name="Group 2" id="2"/>
+          <p:cNvPr id="2" name="Group 2"/>
           <p:cNvGrpSpPr/>
           <p:nvPr/>
         </p:nvGrpSpPr>
         <p:grpSpPr>
-          <a:xfrm rot="0">
+          <a:xfrm>
             <a:off x="0" y="8190636"/>
             <a:ext cx="18477077" cy="3342771"/>
             <a:chOff x="0" y="0"/>
@@ -3835,7 +3872,7 @@
         </p:grpSpPr>
         <p:sp>
           <p:nvSpPr>
-            <p:cNvPr name="Freeform 3" id="3">
+            <p:cNvPr id="3" name="Freeform 3">
               <a:extLst>
                 <a:ext uri="{C183D7F6-B498-43B3-948B-1728B52AA6E4}">
                   <adec:decorative xmlns:adec="http://schemas.microsoft.com/office/drawing/2017/decorative" val="1"/>
@@ -3846,7 +3883,7 @@
             <p:nvPr/>
           </p:nvSpPr>
           <p:spPr>
-            <a:xfrm flipH="false" flipV="false" rot="0">
+            <a:xfrm>
               <a:off x="0" y="0"/>
               <a:ext cx="8493842" cy="1536659"/>
             </a:xfrm>
@@ -3855,9 +3892,9 @@
               <a:gdLst/>
               <a:ahLst/>
               <a:cxnLst/>
-              <a:rect r="r" b="b" t="t" l="l"/>
+              <a:rect l="l" t="t" r="r" b="b"/>
               <a:pathLst>
-                <a:path h="1536659" w="8493842">
+                <a:path w="8493842" h="1536659">
                   <a:moveTo>
                     <a:pt x="0" y="0"/>
                   </a:moveTo>
@@ -3878,16 +3915,23 @@
               <a:srgbClr val="266041"/>
             </a:solidFill>
           </p:spPr>
+          <p:txBody>
+            <a:bodyPr/>
+            <a:lstStyle/>
+            <a:p>
+              <a:endParaRPr lang="fr-FR" dirty="0"/>
+            </a:p>
+          </p:txBody>
         </p:sp>
       </p:grpSp>
       <p:sp>
         <p:nvSpPr>
-          <p:cNvPr name="Freeform 4" id="4"/>
+          <p:cNvPr id="4" name="Freeform 4"/>
           <p:cNvSpPr/>
           <p:nvPr/>
         </p:nvSpPr>
         <p:spPr>
-          <a:xfrm flipH="false" flipV="false" rot="0">
+          <a:xfrm>
             <a:off x="1841166" y="254139"/>
             <a:ext cx="14605669" cy="3797474"/>
           </a:xfrm>
@@ -3896,9 +3940,9 @@
             <a:gdLst/>
             <a:ahLst/>
             <a:cxnLst/>
-            <a:rect r="r" b="b" t="t" l="l"/>
+            <a:rect l="l" t="t" r="r" b="b"/>
             <a:pathLst>
-              <a:path h="3797474" w="14605669">
+              <a:path w="14605669" h="3797474">
                 <a:moveTo>
                   <a:pt x="0" y="0"/>
                 </a:moveTo>
@@ -3921,19 +3965,26 @@
           <a:blipFill>
             <a:blip r:embed="rId2"/>
             <a:stretch>
-              <a:fillRect l="0" t="0" r="0" b="0"/>
+              <a:fillRect/>
             </a:stretch>
           </a:blipFill>
         </p:spPr>
-      </p:sp>
-      <p:sp>
-        <p:nvSpPr>
-          <p:cNvPr name="Freeform 5" id="5"/>
+        <p:txBody>
+          <a:bodyPr/>
+          <a:lstStyle/>
+          <a:p>
+            <a:endParaRPr lang="fr-FR"/>
+          </a:p>
+        </p:txBody>
+      </p:sp>
+      <p:sp>
+        <p:nvSpPr>
+          <p:cNvPr id="5" name="Freeform 5"/>
           <p:cNvSpPr/>
           <p:nvPr/>
         </p:nvSpPr>
         <p:spPr>
-          <a:xfrm flipH="false" flipV="false" rot="0">
+          <a:xfrm>
             <a:off x="1779073" y="4185639"/>
             <a:ext cx="14729854" cy="3995473"/>
           </a:xfrm>
@@ -3942,9 +3993,9 @@
             <a:gdLst/>
             <a:ahLst/>
             <a:cxnLst/>
-            <a:rect r="r" b="b" t="t" l="l"/>
+            <a:rect l="l" t="t" r="r" b="b"/>
             <a:pathLst>
-              <a:path h="3995473" w="14729854">
+              <a:path w="14729854" h="3995473">
                 <a:moveTo>
                   <a:pt x="0" y="0"/>
                 </a:moveTo>
@@ -3967,19 +4018,26 @@
           <a:blipFill>
             <a:blip r:embed="rId3"/>
             <a:stretch>
-              <a:fillRect l="0" t="0" r="0" b="0"/>
+              <a:fillRect/>
             </a:stretch>
           </a:blipFill>
         </p:spPr>
-      </p:sp>
-      <p:sp>
-        <p:nvSpPr>
-          <p:cNvPr name="TextBox 6" id="6"/>
-          <p:cNvSpPr txBox="true"/>
+        <p:txBody>
+          <a:bodyPr/>
+          <a:lstStyle/>
+          <a:p>
+            <a:endParaRPr lang="fr-FR"/>
+          </a:p>
+        </p:txBody>
+      </p:sp>
+      <p:sp>
+        <p:nvSpPr>
+          <p:cNvPr id="6" name="TextBox 6"/>
+          <p:cNvSpPr txBox="1"/>
           <p:nvPr/>
         </p:nvSpPr>
         <p:spPr>
-          <a:xfrm rot="0">
+          <a:xfrm>
             <a:off x="693866" y="8597856"/>
             <a:ext cx="4993523" cy="689019"/>
           </a:xfrm>
@@ -3988,7 +4046,7 @@
           </a:prstGeom>
         </p:spPr>
         <p:txBody>
-          <a:bodyPr anchor="t" rtlCol="false" tIns="0" lIns="0" bIns="0" rIns="0">
+          <a:bodyPr lIns="0" tIns="0" rIns="0" bIns="0" rtlCol="0" anchor="t">
             <a:spAutoFit/>
           </a:bodyPr>
           <a:lstStyle/>
@@ -3999,7 +4057,7 @@
               </a:lnSpc>
             </a:pPr>
             <a:r>
-              <a:rPr lang="en-US" sz="4000" b="true">
+              <a:rPr lang="en-US" sz="4000" b="1">
                 <a:solidFill>
                   <a:srgbClr val="FFFFFF"/>
                 </a:solidFill>
@@ -4015,12 +4073,12 @@
       </p:sp>
       <p:sp>
         <p:nvSpPr>
-          <p:cNvPr name="TextBox 7" id="7"/>
-          <p:cNvSpPr txBox="true"/>
+          <p:cNvPr id="7" name="TextBox 7"/>
+          <p:cNvSpPr txBox="1"/>
           <p:nvPr/>
         </p:nvSpPr>
         <p:spPr>
-          <a:xfrm rot="0">
+          <a:xfrm>
             <a:off x="722441" y="8351886"/>
             <a:ext cx="4993523" cy="350253"/>
           </a:xfrm>
@@ -4029,7 +4087,7 @@
           </a:prstGeom>
         </p:spPr>
         <p:txBody>
-          <a:bodyPr anchor="t" rtlCol="false" tIns="0" lIns="0" bIns="0" rIns="0">
+          <a:bodyPr lIns="0" tIns="0" rIns="0" bIns="0" rtlCol="0" anchor="t">
             <a:spAutoFit/>
           </a:bodyPr>
           <a:lstStyle/>
@@ -4043,7 +4101,7 @@
               </a:spcBef>
             </a:pPr>
             <a:r>
-              <a:rPr lang="en-US" sz="2060">
+              <a:rPr lang="en-US" sz="2060" dirty="0">
                 <a:solidFill>
                   <a:srgbClr val="FFFFFF"/>
                 </a:solidFill>
@@ -4052,19 +4110,19 @@
                 <a:cs typeface="Open Sauce"/>
                 <a:sym typeface="Open Sauce"/>
               </a:rPr>
-              <a:t>View by model - category</a:t>
-            </a:r>
-          </a:p>
-        </p:txBody>
-      </p:sp>
-      <p:sp>
-        <p:nvSpPr>
-          <p:cNvPr name="TextBox 8" id="8"/>
-          <p:cNvSpPr txBox="true"/>
+              <a:t>View by model </a:t>
+            </a:r>
+          </a:p>
+        </p:txBody>
+      </p:sp>
+      <p:sp>
+        <p:nvSpPr>
+          <p:cNvPr id="8" name="TextBox 8"/>
+          <p:cNvSpPr txBox="1"/>
           <p:nvPr/>
         </p:nvSpPr>
         <p:spPr>
-          <a:xfrm rot="0">
+          <a:xfrm>
             <a:off x="693866" y="9220200"/>
             <a:ext cx="13842807" cy="826842"/>
           </a:xfrm>
@@ -4073,7 +4131,7 @@
           </a:prstGeom>
         </p:spPr>
         <p:txBody>
-          <a:bodyPr anchor="t" rtlCol="false" tIns="0" lIns="0" bIns="0" rIns="0">
+          <a:bodyPr lIns="0" tIns="0" rIns="0" bIns="0" rtlCol="0" anchor="t">
             <a:spAutoFit/>
           </a:bodyPr>
           <a:lstStyle/>
@@ -4102,9 +4160,18 @@
                 <a:spcPts val="2208"/>
               </a:lnSpc>
             </a:pPr>
-          </a:p>
-          <a:p>
-            <a:pPr algn="l" marL="0" indent="0" lvl="0">
+            <a:endParaRPr lang="en-US" sz="1577" spc="31">
+              <a:solidFill>
+                <a:srgbClr val="FFFFFF"/>
+              </a:solidFill>
+              <a:latin typeface="Open Sauce"/>
+              <a:ea typeface="Open Sauce"/>
+              <a:cs typeface="Open Sauce"/>
+              <a:sym typeface="Open Sauce"/>
+            </a:endParaRPr>
+          </a:p>
+          <a:p>
+            <a:pPr marL="0" lvl="0" indent="0" algn="l">
               <a:lnSpc>
                 <a:spcPts val="2208"/>
               </a:lnSpc>
@@ -4136,7 +4203,7 @@
 </file>
 
 <file path=ppt/slides/slide4.xml><?xml version="1.0" encoding="utf-8"?>
-<p:sld xmlns:p="http://schemas.openxmlformats.org/presentationml/2006/main" xmlns:a="http://schemas.openxmlformats.org/drawingml/2006/main" xmlns:r="http://schemas.openxmlformats.org/officeDocument/2006/relationships">
+<p:sld xmlns:a="http://schemas.openxmlformats.org/drawingml/2006/main" xmlns:r="http://schemas.openxmlformats.org/officeDocument/2006/relationships" xmlns:p="http://schemas.openxmlformats.org/presentationml/2006/main">
   <p:cSld>
     <p:spTree>
       <p:nvGrpSpPr>
@@ -4154,12 +4221,12 @@
       </p:grpSpPr>
       <p:sp>
         <p:nvSpPr>
-          <p:cNvPr name="Freeform 2" id="2"/>
+          <p:cNvPr id="2" name="Freeform 2"/>
           <p:cNvSpPr/>
           <p:nvPr/>
         </p:nvSpPr>
         <p:spPr>
-          <a:xfrm flipH="false" flipV="false" rot="0">
+          <a:xfrm>
             <a:off x="2286437" y="4454868"/>
             <a:ext cx="13715126" cy="5588914"/>
           </a:xfrm>
@@ -4168,9 +4235,9 @@
             <a:gdLst/>
             <a:ahLst/>
             <a:cxnLst/>
-            <a:rect r="r" b="b" t="t" l="l"/>
+            <a:rect l="l" t="t" r="r" b="b"/>
             <a:pathLst>
-              <a:path h="5588914" w="13715126">
+              <a:path w="13715126" h="5588914">
                 <a:moveTo>
                   <a:pt x="0" y="0"/>
                 </a:moveTo>
@@ -4193,19 +4260,26 @@
           <a:blipFill>
             <a:blip r:embed="rId2"/>
             <a:stretch>
-              <a:fillRect l="0" t="0" r="0" b="0"/>
+              <a:fillRect/>
             </a:stretch>
           </a:blipFill>
         </p:spPr>
-      </p:sp>
-      <p:sp>
-        <p:nvSpPr>
-          <p:cNvPr name="TextBox 3" id="3"/>
-          <p:cNvSpPr txBox="true"/>
+        <p:txBody>
+          <a:bodyPr/>
+          <a:lstStyle/>
+          <a:p>
+            <a:endParaRPr lang="fr-FR"/>
+          </a:p>
+        </p:txBody>
+      </p:sp>
+      <p:sp>
+        <p:nvSpPr>
+          <p:cNvPr id="3" name="TextBox 3"/>
+          <p:cNvSpPr txBox="1"/>
           <p:nvPr/>
         </p:nvSpPr>
         <p:spPr>
-          <a:xfrm rot="0">
+          <a:xfrm>
             <a:off x="1773663" y="2379053"/>
             <a:ext cx="4626154" cy="2228303"/>
           </a:xfrm>
@@ -4214,7 +4288,7 @@
           </a:prstGeom>
         </p:spPr>
         <p:txBody>
-          <a:bodyPr anchor="t" rtlCol="false" tIns="0" lIns="0" bIns="0" rIns="0">
+          <a:bodyPr lIns="0" tIns="0" rIns="0" bIns="0" rtlCol="0" anchor="t">
             <a:spAutoFit/>
           </a:bodyPr>
           <a:lstStyle/>
@@ -4225,7 +4299,7 @@
               </a:lnSpc>
             </a:pPr>
             <a:r>
-              <a:rPr lang="en-US" sz="6399" b="true">
+              <a:rPr lang="en-US" sz="6399" b="1">
                 <a:solidFill>
                   <a:srgbClr val="1A3B29"/>
                 </a:solidFill>
@@ -4244,7 +4318,7 @@
               </a:lnSpc>
             </a:pPr>
             <a:r>
-              <a:rPr lang="en-US" sz="6400" b="true">
+              <a:rPr lang="en-US" sz="6400" b="1">
                 <a:solidFill>
                   <a:srgbClr val="1A3B29"/>
                 </a:solidFill>
@@ -4260,12 +4334,12 @@
       </p:sp>
       <p:sp>
         <p:nvSpPr>
-          <p:cNvPr name="TextBox 4" id="4"/>
-          <p:cNvSpPr txBox="true"/>
+          <p:cNvPr id="4" name="TextBox 4"/>
+          <p:cNvSpPr txBox="1"/>
           <p:nvPr/>
         </p:nvSpPr>
         <p:spPr>
-          <a:xfrm rot="0">
+          <a:xfrm>
             <a:off x="8663111" y="2178926"/>
             <a:ext cx="8596189" cy="989965"/>
           </a:xfrm>
@@ -4274,7 +4348,7 @@
           </a:prstGeom>
         </p:spPr>
         <p:txBody>
-          <a:bodyPr anchor="t" rtlCol="false" tIns="0" lIns="0" bIns="0" rIns="0">
+          <a:bodyPr lIns="0" tIns="0" rIns="0" bIns="0" rtlCol="0" anchor="t">
             <a:spAutoFit/>
           </a:bodyPr>
           <a:lstStyle/>
@@ -4294,22 +4368,10 @@
                 <a:cs typeface="Open Sauce"/>
                 <a:sym typeface="Open Sauce"/>
               </a:rPr>
-              <a:t>Th</a:t>
-            </a:r>
-            <a:r>
-              <a:rPr lang="en-US" sz="1899" spc="37">
-                <a:solidFill>
-                  <a:srgbClr val="1A3B29"/>
-                </a:solidFill>
-                <a:latin typeface="Open Sauce"/>
-                <a:ea typeface="Open Sauce"/>
-                <a:cs typeface="Open Sauce"/>
-                <a:sym typeface="Open Sauce"/>
-              </a:rPr>
-              <a:t>e visualization shows that Medium</a:t>
-            </a:r>
-            <a:r>
-              <a:rPr lang="en-US" sz="1899" spc="37" u="none">
+              <a:t>The visualization shows that Medium</a:t>
+            </a:r>
+            <a:r>
+              <a:rPr lang="en-US" sz="1899" u="none" spc="37">
                 <a:solidFill>
                   <a:srgbClr val="1A3B29"/>
                 </a:solidFill>
@@ -4332,7 +4394,7 @@
 </file>
 
 <file path=ppt/slides/slide5.xml><?xml version="1.0" encoding="utf-8"?>
-<p:sld xmlns:p="http://schemas.openxmlformats.org/presentationml/2006/main" xmlns:a="http://schemas.openxmlformats.org/drawingml/2006/main" xmlns:r="http://schemas.openxmlformats.org/officeDocument/2006/relationships">
+<p:sld xmlns:a="http://schemas.openxmlformats.org/drawingml/2006/main" xmlns:r="http://schemas.openxmlformats.org/officeDocument/2006/relationships" xmlns:p="http://schemas.openxmlformats.org/presentationml/2006/main">
   <p:cSld>
     <p:spTree>
       <p:nvGrpSpPr>
@@ -4350,12 +4412,12 @@
       </p:grpSpPr>
       <p:sp>
         <p:nvSpPr>
-          <p:cNvPr name="Freeform 2" id="2"/>
+          <p:cNvPr id="2" name="Freeform 2"/>
           <p:cNvSpPr/>
           <p:nvPr/>
         </p:nvSpPr>
         <p:spPr>
-          <a:xfrm flipH="false" flipV="false" rot="0">
+          <a:xfrm>
             <a:off x="1028700" y="1028700"/>
             <a:ext cx="16263865" cy="6769834"/>
           </a:xfrm>
@@ -4364,9 +4426,9 @@
             <a:gdLst/>
             <a:ahLst/>
             <a:cxnLst/>
-            <a:rect r="r" b="b" t="t" l="l"/>
+            <a:rect l="l" t="t" r="r" b="b"/>
             <a:pathLst>
-              <a:path h="6769834" w="16263865">
+              <a:path w="16263865" h="6769834">
                 <a:moveTo>
                   <a:pt x="0" y="0"/>
                 </a:moveTo>
@@ -4389,19 +4451,26 @@
           <a:blipFill>
             <a:blip r:embed="rId2"/>
             <a:stretch>
-              <a:fillRect l="0" t="0" r="0" b="0"/>
+              <a:fillRect/>
             </a:stretch>
           </a:blipFill>
         </p:spPr>
-      </p:sp>
-      <p:sp>
-        <p:nvSpPr>
-          <p:cNvPr name="TextBox 3" id="3"/>
-          <p:cNvSpPr txBox="true"/>
+        <p:txBody>
+          <a:bodyPr/>
+          <a:lstStyle/>
+          <a:p>
+            <a:endParaRPr lang="fr-FR"/>
+          </a:p>
+        </p:txBody>
+      </p:sp>
+      <p:sp>
+        <p:nvSpPr>
+          <p:cNvPr id="3" name="TextBox 3"/>
+          <p:cNvSpPr txBox="1"/>
           <p:nvPr/>
         </p:nvSpPr>
         <p:spPr>
-          <a:xfrm rot="0">
+          <a:xfrm>
             <a:off x="1028700" y="7912205"/>
             <a:ext cx="16263865" cy="550573"/>
           </a:xfrm>
@@ -4410,12 +4479,12 @@
           </a:prstGeom>
         </p:spPr>
         <p:txBody>
-          <a:bodyPr anchor="t" rtlCol="false" tIns="0" lIns="0" bIns="0" rIns="0">
+          <a:bodyPr lIns="0" tIns="0" rIns="0" bIns="0" rtlCol="0" anchor="t">
             <a:spAutoFit/>
           </a:bodyPr>
           <a:lstStyle/>
           <a:p>
-            <a:pPr algn="l" marL="0" indent="0" lvl="0">
+            <a:pPr marL="0" lvl="0" indent="0" algn="l">
               <a:lnSpc>
                 <a:spcPts val="2208"/>
               </a:lnSpc>
@@ -4436,7 +4505,7 @@
               <a:t>The</a:t>
             </a:r>
             <a:r>
-              <a:rPr lang="en-US" sz="1577" spc="31" strike="noStrike" u="none">
+              <a:rPr lang="en-US" sz="1577" u="none" strike="noStrike" spc="31">
                 <a:solidFill>
                   <a:srgbClr val="000000"/>
                 </a:solidFill>
@@ -4445,751 +4514,7 @@
                 <a:cs typeface="Open Sauce"/>
                 <a:sym typeface="Open Sauce"/>
               </a:rPr>
-              <a:t> visuali</a:t>
-            </a:r>
-            <a:r>
-              <a:rPr lang="en-US" sz="1577" spc="31" strike="noStrike" u="none">
-                <a:solidFill>
-                  <a:srgbClr val="000000"/>
-                </a:solidFill>
-                <a:latin typeface="Open Sauce"/>
-                <a:ea typeface="Open Sauce"/>
-                <a:cs typeface="Open Sauce"/>
-                <a:sym typeface="Open Sauce"/>
-              </a:rPr>
-              <a:t>z</a:t>
-            </a:r>
-            <a:r>
-              <a:rPr lang="en-US" sz="1577" spc="31" strike="noStrike" u="none">
-                <a:solidFill>
-                  <a:srgbClr val="000000"/>
-                </a:solidFill>
-                <a:latin typeface="Open Sauce"/>
-                <a:ea typeface="Open Sauce"/>
-                <a:cs typeface="Open Sauce"/>
-                <a:sym typeface="Open Sauce"/>
-              </a:rPr>
-              <a:t>ation </a:t>
-            </a:r>
-            <a:r>
-              <a:rPr lang="en-US" sz="1577" spc="31" strike="noStrike" u="none">
-                <a:solidFill>
-                  <a:srgbClr val="000000"/>
-                </a:solidFill>
-                <a:latin typeface="Open Sauce"/>
-                <a:ea typeface="Open Sauce"/>
-                <a:cs typeface="Open Sauce"/>
-                <a:sym typeface="Open Sauce"/>
-              </a:rPr>
-              <a:t>sh</a:t>
-            </a:r>
-            <a:r>
-              <a:rPr lang="en-US" sz="1577" spc="31" strike="noStrike" u="none">
-                <a:solidFill>
-                  <a:srgbClr val="000000"/>
-                </a:solidFill>
-                <a:latin typeface="Open Sauce"/>
-                <a:ea typeface="Open Sauce"/>
-                <a:cs typeface="Open Sauce"/>
-                <a:sym typeface="Open Sauce"/>
-              </a:rPr>
-              <a:t>o</a:t>
-            </a:r>
-            <a:r>
-              <a:rPr lang="en-US" sz="1577" spc="31" strike="noStrike" u="none">
-                <a:solidFill>
-                  <a:srgbClr val="000000"/>
-                </a:solidFill>
-                <a:latin typeface="Open Sauce"/>
-                <a:ea typeface="Open Sauce"/>
-                <a:cs typeface="Open Sauce"/>
-                <a:sym typeface="Open Sauce"/>
-              </a:rPr>
-              <a:t>ws tha</a:t>
-            </a:r>
-            <a:r>
-              <a:rPr lang="en-US" sz="1577" spc="31" strike="noStrike" u="none">
-                <a:solidFill>
-                  <a:srgbClr val="000000"/>
-                </a:solidFill>
-                <a:latin typeface="Open Sauce"/>
-                <a:ea typeface="Open Sauce"/>
-                <a:cs typeface="Open Sauce"/>
-                <a:sym typeface="Open Sauce"/>
-              </a:rPr>
-              <a:t>t</a:t>
-            </a:r>
-            <a:r>
-              <a:rPr lang="en-US" sz="1577" spc="31" strike="noStrike" u="none">
-                <a:solidFill>
-                  <a:srgbClr val="000000"/>
-                </a:solidFill>
-                <a:latin typeface="Open Sauce"/>
-                <a:ea typeface="Open Sauce"/>
-                <a:cs typeface="Open Sauce"/>
-                <a:sym typeface="Open Sauce"/>
-              </a:rPr>
-              <a:t> ave</a:t>
-            </a:r>
-            <a:r>
-              <a:rPr lang="en-US" sz="1577" spc="31" strike="noStrike" u="none">
-                <a:solidFill>
-                  <a:srgbClr val="000000"/>
-                </a:solidFill>
-                <a:latin typeface="Open Sauce"/>
-                <a:ea typeface="Open Sauce"/>
-                <a:cs typeface="Open Sauce"/>
-                <a:sym typeface="Open Sauce"/>
-              </a:rPr>
-              <a:t>r</a:t>
-            </a:r>
-            <a:r>
-              <a:rPr lang="en-US" sz="1577" spc="31" strike="noStrike" u="none">
-                <a:solidFill>
-                  <a:srgbClr val="000000"/>
-                </a:solidFill>
-                <a:latin typeface="Open Sauce"/>
-                <a:ea typeface="Open Sauce"/>
-                <a:cs typeface="Open Sauce"/>
-                <a:sym typeface="Open Sauce"/>
-              </a:rPr>
-              <a:t>ag</a:t>
-            </a:r>
-            <a:r>
-              <a:rPr lang="en-US" sz="1577" spc="31" strike="noStrike" u="none">
-                <a:solidFill>
-                  <a:srgbClr val="000000"/>
-                </a:solidFill>
-                <a:latin typeface="Open Sauce"/>
-                <a:ea typeface="Open Sauce"/>
-                <a:cs typeface="Open Sauce"/>
-                <a:sym typeface="Open Sauce"/>
-              </a:rPr>
-              <a:t>e </a:t>
-            </a:r>
-            <a:r>
-              <a:rPr lang="en-US" sz="1577" spc="31" strike="noStrike" u="none">
-                <a:solidFill>
-                  <a:srgbClr val="000000"/>
-                </a:solidFill>
-                <a:latin typeface="Open Sauce"/>
-                <a:ea typeface="Open Sauce"/>
-                <a:cs typeface="Open Sauce"/>
-                <a:sym typeface="Open Sauce"/>
-              </a:rPr>
-              <a:t>infer</a:t>
-            </a:r>
-            <a:r>
-              <a:rPr lang="en-US" sz="1577" spc="31" strike="noStrike" u="none">
-                <a:solidFill>
-                  <a:srgbClr val="000000"/>
-                </a:solidFill>
-                <a:latin typeface="Open Sauce"/>
-                <a:ea typeface="Open Sauce"/>
-                <a:cs typeface="Open Sauce"/>
-                <a:sym typeface="Open Sauce"/>
-              </a:rPr>
-              <a:t>e</a:t>
-            </a:r>
-            <a:r>
-              <a:rPr lang="en-US" sz="1577" spc="31" strike="noStrike" u="none">
-                <a:solidFill>
-                  <a:srgbClr val="000000"/>
-                </a:solidFill>
-                <a:latin typeface="Open Sauce"/>
-                <a:ea typeface="Open Sauce"/>
-                <a:cs typeface="Open Sauce"/>
-                <a:sym typeface="Open Sauce"/>
-              </a:rPr>
-              <a:t>nce</a:t>
-            </a:r>
-            <a:r>
-              <a:rPr lang="en-US" sz="1577" spc="31" strike="noStrike" u="none">
-                <a:solidFill>
-                  <a:srgbClr val="000000"/>
-                </a:solidFill>
-                <a:latin typeface="Open Sauce"/>
-                <a:ea typeface="Open Sauce"/>
-                <a:cs typeface="Open Sauce"/>
-                <a:sym typeface="Open Sauce"/>
-              </a:rPr>
-              <a:t> cons</a:t>
-            </a:r>
-            <a:r>
-              <a:rPr lang="en-US" sz="1577" spc="31" strike="noStrike" u="none">
-                <a:solidFill>
-                  <a:srgbClr val="000000"/>
-                </a:solidFill>
-                <a:latin typeface="Open Sauce"/>
-                <a:ea typeface="Open Sauce"/>
-                <a:cs typeface="Open Sauce"/>
-                <a:sym typeface="Open Sauce"/>
-              </a:rPr>
-              <a:t>u</a:t>
-            </a:r>
-            <a:r>
-              <a:rPr lang="en-US" sz="1577" spc="31" strike="noStrike" u="none">
-                <a:solidFill>
-                  <a:srgbClr val="000000"/>
-                </a:solidFill>
-                <a:latin typeface="Open Sauce"/>
-                <a:ea typeface="Open Sauce"/>
-                <a:cs typeface="Open Sauce"/>
-                <a:sym typeface="Open Sauce"/>
-              </a:rPr>
-              <a:t>m</a:t>
-            </a:r>
-            <a:r>
-              <a:rPr lang="en-US" sz="1577" spc="31" strike="noStrike" u="none">
-                <a:solidFill>
-                  <a:srgbClr val="000000"/>
-                </a:solidFill>
-                <a:latin typeface="Open Sauce"/>
-                <a:ea typeface="Open Sauce"/>
-                <a:cs typeface="Open Sauce"/>
-                <a:sym typeface="Open Sauce"/>
-              </a:rPr>
-              <a:t>p</a:t>
-            </a:r>
-            <a:r>
-              <a:rPr lang="en-US" sz="1577" spc="31" strike="noStrike" u="none">
-                <a:solidFill>
-                  <a:srgbClr val="000000"/>
-                </a:solidFill>
-                <a:latin typeface="Open Sauce"/>
-                <a:ea typeface="Open Sauce"/>
-                <a:cs typeface="Open Sauce"/>
-                <a:sym typeface="Open Sauce"/>
-              </a:rPr>
-              <a:t>tion inc</a:t>
-            </a:r>
-            <a:r>
-              <a:rPr lang="en-US" sz="1577" spc="31" strike="noStrike" u="none">
-                <a:solidFill>
-                  <a:srgbClr val="000000"/>
-                </a:solidFill>
-                <a:latin typeface="Open Sauce"/>
-                <a:ea typeface="Open Sauce"/>
-                <a:cs typeface="Open Sauce"/>
-                <a:sym typeface="Open Sauce"/>
-              </a:rPr>
-              <a:t>r</a:t>
-            </a:r>
-            <a:r>
-              <a:rPr lang="en-US" sz="1577" spc="31" strike="noStrike" u="none">
-                <a:solidFill>
-                  <a:srgbClr val="000000"/>
-                </a:solidFill>
-                <a:latin typeface="Open Sauce"/>
-                <a:ea typeface="Open Sauce"/>
-                <a:cs typeface="Open Sauce"/>
-                <a:sym typeface="Open Sauce"/>
-              </a:rPr>
-              <a:t>ea</a:t>
-            </a:r>
-            <a:r>
-              <a:rPr lang="en-US" sz="1577" spc="31" strike="noStrike" u="none">
-                <a:solidFill>
-                  <a:srgbClr val="000000"/>
-                </a:solidFill>
-                <a:latin typeface="Open Sauce"/>
-                <a:ea typeface="Open Sauce"/>
-                <a:cs typeface="Open Sauce"/>
-                <a:sym typeface="Open Sauce"/>
-              </a:rPr>
-              <a:t>s</a:t>
-            </a:r>
-            <a:r>
-              <a:rPr lang="en-US" sz="1577" spc="31" strike="noStrike" u="none">
-                <a:solidFill>
-                  <a:srgbClr val="000000"/>
-                </a:solidFill>
-                <a:latin typeface="Open Sauce"/>
-                <a:ea typeface="Open Sauce"/>
-                <a:cs typeface="Open Sauce"/>
-                <a:sym typeface="Open Sauce"/>
-              </a:rPr>
-              <a:t>e</a:t>
-            </a:r>
-            <a:r>
-              <a:rPr lang="en-US" sz="1577" spc="31" strike="noStrike" u="none">
-                <a:solidFill>
-                  <a:srgbClr val="000000"/>
-                </a:solidFill>
-                <a:latin typeface="Open Sauce"/>
-                <a:ea typeface="Open Sauce"/>
-                <a:cs typeface="Open Sauce"/>
-                <a:sym typeface="Open Sauce"/>
-              </a:rPr>
-              <a:t>s</a:t>
-            </a:r>
-            <a:r>
-              <a:rPr lang="en-US" sz="1577" spc="31" strike="noStrike" u="none">
-                <a:solidFill>
-                  <a:srgbClr val="000000"/>
-                </a:solidFill>
-                <a:latin typeface="Open Sauce"/>
-                <a:ea typeface="Open Sauce"/>
-                <a:cs typeface="Open Sauce"/>
-                <a:sym typeface="Open Sauce"/>
-              </a:rPr>
-              <a:t> </a:t>
-            </a:r>
-            <a:r>
-              <a:rPr lang="en-US" sz="1577" spc="31" strike="noStrike" u="none">
-                <a:solidFill>
-                  <a:srgbClr val="000000"/>
-                </a:solidFill>
-                <a:latin typeface="Open Sauce"/>
-                <a:ea typeface="Open Sauce"/>
-                <a:cs typeface="Open Sauce"/>
-                <a:sym typeface="Open Sauce"/>
-              </a:rPr>
-              <a:t>wi</a:t>
-            </a:r>
-            <a:r>
-              <a:rPr lang="en-US" sz="1577" spc="31" strike="noStrike" u="none">
-                <a:solidFill>
-                  <a:srgbClr val="000000"/>
-                </a:solidFill>
-                <a:latin typeface="Open Sauce"/>
-                <a:ea typeface="Open Sauce"/>
-                <a:cs typeface="Open Sauce"/>
-                <a:sym typeface="Open Sauce"/>
-              </a:rPr>
-              <a:t>t</a:t>
-            </a:r>
-            <a:r>
-              <a:rPr lang="en-US" sz="1577" spc="31" strike="noStrike" u="none">
-                <a:solidFill>
-                  <a:srgbClr val="000000"/>
-                </a:solidFill>
-                <a:latin typeface="Open Sauce"/>
-                <a:ea typeface="Open Sauce"/>
-                <a:cs typeface="Open Sauce"/>
-                <a:sym typeface="Open Sauce"/>
-              </a:rPr>
-              <a:t>h</a:t>
-            </a:r>
-            <a:r>
-              <a:rPr lang="en-US" sz="1577" spc="31" strike="noStrike" u="none">
-                <a:solidFill>
-                  <a:srgbClr val="000000"/>
-                </a:solidFill>
-                <a:latin typeface="Open Sauce"/>
-                <a:ea typeface="Open Sauce"/>
-                <a:cs typeface="Open Sauce"/>
-                <a:sym typeface="Open Sauce"/>
-              </a:rPr>
-              <a:t> mod</a:t>
-            </a:r>
-            <a:r>
-              <a:rPr lang="en-US" sz="1577" spc="31" strike="noStrike" u="none">
-                <a:solidFill>
-                  <a:srgbClr val="000000"/>
-                </a:solidFill>
-                <a:latin typeface="Open Sauce"/>
-                <a:ea typeface="Open Sauce"/>
-                <a:cs typeface="Open Sauce"/>
-                <a:sym typeface="Open Sauce"/>
-              </a:rPr>
-              <a:t>e</a:t>
-            </a:r>
-            <a:r>
-              <a:rPr lang="en-US" sz="1577" spc="31" strike="noStrike" u="none">
-                <a:solidFill>
-                  <a:srgbClr val="000000"/>
-                </a:solidFill>
-                <a:latin typeface="Open Sauce"/>
-                <a:ea typeface="Open Sauce"/>
-                <a:cs typeface="Open Sauce"/>
-                <a:sym typeface="Open Sauce"/>
-              </a:rPr>
-              <a:t>l</a:t>
-            </a:r>
-            <a:r>
-              <a:rPr lang="en-US" sz="1577" spc="31" strike="noStrike" u="none">
-                <a:solidFill>
-                  <a:srgbClr val="000000"/>
-                </a:solidFill>
-                <a:latin typeface="Open Sauce"/>
-                <a:ea typeface="Open Sauce"/>
-                <a:cs typeface="Open Sauce"/>
-                <a:sym typeface="Open Sauce"/>
-              </a:rPr>
-              <a:t> siz</a:t>
-            </a:r>
-            <a:r>
-              <a:rPr lang="en-US" sz="1577" spc="31" strike="noStrike" u="none">
-                <a:solidFill>
-                  <a:srgbClr val="000000"/>
-                </a:solidFill>
-                <a:latin typeface="Open Sauce"/>
-                <a:ea typeface="Open Sauce"/>
-                <a:cs typeface="Open Sauce"/>
-                <a:sym typeface="Open Sauce"/>
-              </a:rPr>
-              <a:t>e, </a:t>
-            </a:r>
-            <a:r>
-              <a:rPr lang="en-US" sz="1577" spc="31" strike="noStrike" u="none">
-                <a:solidFill>
-                  <a:srgbClr val="000000"/>
-                </a:solidFill>
-                <a:latin typeface="Open Sauce"/>
-                <a:ea typeface="Open Sauce"/>
-                <a:cs typeface="Open Sauce"/>
-                <a:sym typeface="Open Sauce"/>
-              </a:rPr>
-              <a:t>bei</a:t>
-            </a:r>
-            <a:r>
-              <a:rPr lang="en-US" sz="1577" spc="31" strike="noStrike" u="none">
-                <a:solidFill>
-                  <a:srgbClr val="000000"/>
-                </a:solidFill>
-                <a:latin typeface="Open Sauce"/>
-                <a:ea typeface="Open Sauce"/>
-                <a:cs typeface="Open Sauce"/>
-                <a:sym typeface="Open Sauce"/>
-              </a:rPr>
-              <a:t>n</a:t>
-            </a:r>
-            <a:r>
-              <a:rPr lang="en-US" sz="1577" spc="31" strike="noStrike" u="none">
-                <a:solidFill>
-                  <a:srgbClr val="000000"/>
-                </a:solidFill>
-                <a:latin typeface="Open Sauce"/>
-                <a:ea typeface="Open Sauce"/>
-                <a:cs typeface="Open Sauce"/>
-                <a:sym typeface="Open Sauce"/>
-              </a:rPr>
-              <a:t>g</a:t>
-            </a:r>
-            <a:r>
-              <a:rPr lang="en-US" sz="1577" spc="31" strike="noStrike" u="none">
-                <a:solidFill>
-                  <a:srgbClr val="000000"/>
-                </a:solidFill>
-                <a:latin typeface="Open Sauce"/>
-                <a:ea typeface="Open Sauce"/>
-                <a:cs typeface="Open Sauce"/>
-                <a:sym typeface="Open Sauce"/>
-              </a:rPr>
-              <a:t> l</a:t>
-            </a:r>
-            <a:r>
-              <a:rPr lang="en-US" sz="1577" spc="31" strike="noStrike" u="none">
-                <a:solidFill>
-                  <a:srgbClr val="000000"/>
-                </a:solidFill>
-                <a:latin typeface="Open Sauce"/>
-                <a:ea typeface="Open Sauce"/>
-                <a:cs typeface="Open Sauce"/>
-                <a:sym typeface="Open Sauce"/>
-              </a:rPr>
-              <a:t>ow</a:t>
-            </a:r>
-            <a:r>
-              <a:rPr lang="en-US" sz="1577" spc="31" strike="noStrike" u="none">
-                <a:solidFill>
-                  <a:srgbClr val="000000"/>
-                </a:solidFill>
-                <a:latin typeface="Open Sauce"/>
-                <a:ea typeface="Open Sauce"/>
-                <a:cs typeface="Open Sauce"/>
-                <a:sym typeface="Open Sauce"/>
-              </a:rPr>
-              <a:t> </a:t>
-            </a:r>
-            <a:r>
-              <a:rPr lang="en-US" sz="1577" spc="31" strike="noStrike" u="none">
-                <a:solidFill>
-                  <a:srgbClr val="000000"/>
-                </a:solidFill>
-                <a:latin typeface="Open Sauce"/>
-                <a:ea typeface="Open Sauce"/>
-                <a:cs typeface="Open Sauce"/>
-                <a:sym typeface="Open Sauce"/>
-              </a:rPr>
-              <a:t>f</a:t>
-            </a:r>
-            <a:r>
-              <a:rPr lang="en-US" sz="1577" spc="31" strike="noStrike" u="none">
-                <a:solidFill>
-                  <a:srgbClr val="000000"/>
-                </a:solidFill>
-                <a:latin typeface="Open Sauce"/>
-                <a:ea typeface="Open Sauce"/>
-                <a:cs typeface="Open Sauce"/>
-                <a:sym typeface="Open Sauce"/>
-              </a:rPr>
-              <a:t>or Small</a:t>
-            </a:r>
-            <a:r>
-              <a:rPr lang="en-US" sz="1577" spc="31" strike="noStrike" u="none">
-                <a:solidFill>
-                  <a:srgbClr val="000000"/>
-                </a:solidFill>
-                <a:latin typeface="Open Sauce"/>
-                <a:ea typeface="Open Sauce"/>
-                <a:cs typeface="Open Sauce"/>
-                <a:sym typeface="Open Sauce"/>
-              </a:rPr>
-              <a:t> models</a:t>
-            </a:r>
-            <a:r>
-              <a:rPr lang="en-US" sz="1577" spc="31" strike="noStrike" u="none">
-                <a:solidFill>
-                  <a:srgbClr val="000000"/>
-                </a:solidFill>
-                <a:latin typeface="Open Sauce"/>
-                <a:ea typeface="Open Sauce"/>
-                <a:cs typeface="Open Sauce"/>
-                <a:sym typeface="Open Sauce"/>
-              </a:rPr>
-              <a:t>, mod</a:t>
-            </a:r>
-            <a:r>
-              <a:rPr lang="en-US" sz="1577" spc="31" strike="noStrike" u="none">
-                <a:solidFill>
-                  <a:srgbClr val="000000"/>
-                </a:solidFill>
-                <a:latin typeface="Open Sauce"/>
-                <a:ea typeface="Open Sauce"/>
-                <a:cs typeface="Open Sauce"/>
-                <a:sym typeface="Open Sauce"/>
-              </a:rPr>
-              <a:t>e</a:t>
-            </a:r>
-            <a:r>
-              <a:rPr lang="en-US" sz="1577" spc="31" strike="noStrike" u="none">
-                <a:solidFill>
-                  <a:srgbClr val="000000"/>
-                </a:solidFill>
-                <a:latin typeface="Open Sauce"/>
-                <a:ea typeface="Open Sauce"/>
-                <a:cs typeface="Open Sauce"/>
-                <a:sym typeface="Open Sauce"/>
-              </a:rPr>
-              <a:t>r</a:t>
-            </a:r>
-            <a:r>
-              <a:rPr lang="en-US" sz="1577" spc="31" strike="noStrike" u="none">
-                <a:solidFill>
-                  <a:srgbClr val="000000"/>
-                </a:solidFill>
-                <a:latin typeface="Open Sauce"/>
-                <a:ea typeface="Open Sauce"/>
-                <a:cs typeface="Open Sauce"/>
-                <a:sym typeface="Open Sauce"/>
-              </a:rPr>
-              <a:t>at</a:t>
-            </a:r>
-            <a:r>
-              <a:rPr lang="en-US" sz="1577" spc="31" strike="noStrike" u="none">
-                <a:solidFill>
-                  <a:srgbClr val="000000"/>
-                </a:solidFill>
-                <a:latin typeface="Open Sauce"/>
-                <a:ea typeface="Open Sauce"/>
-                <a:cs typeface="Open Sauce"/>
-                <a:sym typeface="Open Sauce"/>
-              </a:rPr>
-              <a:t>e </a:t>
-            </a:r>
-            <a:r>
-              <a:rPr lang="en-US" sz="1577" spc="31" strike="noStrike" u="none">
-                <a:solidFill>
-                  <a:srgbClr val="000000"/>
-                </a:solidFill>
-                <a:latin typeface="Open Sauce"/>
-                <a:ea typeface="Open Sauce"/>
-                <a:cs typeface="Open Sauce"/>
-                <a:sym typeface="Open Sauce"/>
-              </a:rPr>
-              <a:t>f</a:t>
-            </a:r>
-            <a:r>
-              <a:rPr lang="en-US" sz="1577" spc="31" strike="noStrike" u="none">
-                <a:solidFill>
-                  <a:srgbClr val="000000"/>
-                </a:solidFill>
-                <a:latin typeface="Open Sauce"/>
-                <a:ea typeface="Open Sauce"/>
-                <a:cs typeface="Open Sauce"/>
-                <a:sym typeface="Open Sauce"/>
-              </a:rPr>
-              <a:t>or Medium </a:t>
-            </a:r>
-            <a:r>
-              <a:rPr lang="en-US" sz="1577" spc="31" strike="noStrike" u="none">
-                <a:solidFill>
-                  <a:srgbClr val="000000"/>
-                </a:solidFill>
-                <a:latin typeface="Open Sauce"/>
-                <a:ea typeface="Open Sauce"/>
-                <a:cs typeface="Open Sauce"/>
-                <a:sym typeface="Open Sauce"/>
-              </a:rPr>
-              <a:t>mod</a:t>
-            </a:r>
-            <a:r>
-              <a:rPr lang="en-US" sz="1577" spc="31" strike="noStrike" u="none">
-                <a:solidFill>
-                  <a:srgbClr val="000000"/>
-                </a:solidFill>
-                <a:latin typeface="Open Sauce"/>
-                <a:ea typeface="Open Sauce"/>
-                <a:cs typeface="Open Sauce"/>
-                <a:sym typeface="Open Sauce"/>
-              </a:rPr>
-              <a:t>e</a:t>
-            </a:r>
-            <a:r>
-              <a:rPr lang="en-US" sz="1577" spc="31" strike="noStrike" u="none">
-                <a:solidFill>
-                  <a:srgbClr val="000000"/>
-                </a:solidFill>
-                <a:latin typeface="Open Sauce"/>
-                <a:ea typeface="Open Sauce"/>
-                <a:cs typeface="Open Sauce"/>
-                <a:sym typeface="Open Sauce"/>
-              </a:rPr>
-              <a:t>l</a:t>
-            </a:r>
-            <a:r>
-              <a:rPr lang="en-US" sz="1577" spc="31" strike="noStrike" u="none">
-                <a:solidFill>
-                  <a:srgbClr val="000000"/>
-                </a:solidFill>
-                <a:latin typeface="Open Sauce"/>
-                <a:ea typeface="Open Sauce"/>
-                <a:cs typeface="Open Sauce"/>
-                <a:sym typeface="Open Sauce"/>
-              </a:rPr>
-              <a:t>s</a:t>
-            </a:r>
-            <a:r>
-              <a:rPr lang="en-US" sz="1577" spc="31" strike="noStrike" u="none">
-                <a:solidFill>
-                  <a:srgbClr val="000000"/>
-                </a:solidFill>
-                <a:latin typeface="Open Sauce"/>
-                <a:ea typeface="Open Sauce"/>
-                <a:cs typeface="Open Sauce"/>
-                <a:sym typeface="Open Sauce"/>
-              </a:rPr>
-              <a:t>,</a:t>
-            </a:r>
-            <a:r>
-              <a:rPr lang="en-US" sz="1577" spc="31" strike="noStrike" u="none">
-                <a:solidFill>
-                  <a:srgbClr val="000000"/>
-                </a:solidFill>
-                <a:latin typeface="Open Sauce"/>
-                <a:ea typeface="Open Sauce"/>
-                <a:cs typeface="Open Sauce"/>
-                <a:sym typeface="Open Sauce"/>
-              </a:rPr>
-              <a:t> </a:t>
-            </a:r>
-            <a:r>
-              <a:rPr lang="en-US" sz="1577" spc="31" strike="noStrike" u="none">
-                <a:solidFill>
-                  <a:srgbClr val="000000"/>
-                </a:solidFill>
-                <a:latin typeface="Open Sauce"/>
-                <a:ea typeface="Open Sauce"/>
-                <a:cs typeface="Open Sauce"/>
-                <a:sym typeface="Open Sauce"/>
-              </a:rPr>
-              <a:t>and </a:t>
-            </a:r>
-            <a:r>
-              <a:rPr lang="en-US" sz="1577" spc="31" strike="noStrike" u="none">
-                <a:solidFill>
-                  <a:srgbClr val="000000"/>
-                </a:solidFill>
-                <a:latin typeface="Open Sauce"/>
-                <a:ea typeface="Open Sauce"/>
-                <a:cs typeface="Open Sauce"/>
-                <a:sym typeface="Open Sauce"/>
-              </a:rPr>
-              <a:t>ve</a:t>
-            </a:r>
-            <a:r>
-              <a:rPr lang="en-US" sz="1577" spc="31" strike="noStrike" u="none">
-                <a:solidFill>
-                  <a:srgbClr val="000000"/>
-                </a:solidFill>
-                <a:latin typeface="Open Sauce"/>
-                <a:ea typeface="Open Sauce"/>
-                <a:cs typeface="Open Sauce"/>
-                <a:sym typeface="Open Sauce"/>
-              </a:rPr>
-              <a:t>ry</a:t>
-            </a:r>
-            <a:r>
-              <a:rPr lang="en-US" sz="1577" spc="31" strike="noStrike" u="none">
-                <a:solidFill>
-                  <a:srgbClr val="000000"/>
-                </a:solidFill>
-                <a:latin typeface="Open Sauce"/>
-                <a:ea typeface="Open Sauce"/>
-                <a:cs typeface="Open Sauce"/>
-                <a:sym typeface="Open Sauce"/>
-              </a:rPr>
-              <a:t> </a:t>
-            </a:r>
-            <a:r>
-              <a:rPr lang="en-US" sz="1577" spc="31" strike="noStrike" u="none">
-                <a:solidFill>
-                  <a:srgbClr val="000000"/>
-                </a:solidFill>
-                <a:latin typeface="Open Sauce"/>
-                <a:ea typeface="Open Sauce"/>
-                <a:cs typeface="Open Sauce"/>
-                <a:sym typeface="Open Sauce"/>
-              </a:rPr>
-              <a:t>high f</a:t>
-            </a:r>
-            <a:r>
-              <a:rPr lang="en-US" sz="1577" spc="31" strike="noStrike" u="none">
-                <a:solidFill>
-                  <a:srgbClr val="000000"/>
-                </a:solidFill>
-                <a:latin typeface="Open Sauce"/>
-                <a:ea typeface="Open Sauce"/>
-                <a:cs typeface="Open Sauce"/>
-                <a:sym typeface="Open Sauce"/>
-              </a:rPr>
-              <a:t>or Large</a:t>
-            </a:r>
-            <a:r>
-              <a:rPr lang="en-US" sz="1577" spc="31" strike="noStrike" u="none">
-                <a:solidFill>
-                  <a:srgbClr val="000000"/>
-                </a:solidFill>
-                <a:latin typeface="Open Sauce"/>
-                <a:ea typeface="Open Sauce"/>
-                <a:cs typeface="Open Sauce"/>
-                <a:sym typeface="Open Sauce"/>
-              </a:rPr>
-              <a:t> models</a:t>
-            </a:r>
-            <a:r>
-              <a:rPr lang="en-US" sz="1577" spc="31" strike="noStrike" u="none">
-                <a:solidFill>
-                  <a:srgbClr val="000000"/>
-                </a:solidFill>
-                <a:latin typeface="Open Sauce"/>
-                <a:ea typeface="Open Sauce"/>
-                <a:cs typeface="Open Sauce"/>
-                <a:sym typeface="Open Sauce"/>
-              </a:rPr>
-              <a:t>.</a:t>
+              <a:t> visualization shows that average inference consumption increases with model size, being low for Small models, moderate for Medium models, and very high for Large models.</a:t>
             </a:r>
           </a:p>
         </p:txBody>
@@ -5203,7 +4528,7 @@
 </file>
 
 <file path=ppt/slides/slide6.xml><?xml version="1.0" encoding="utf-8"?>
-<p:sld xmlns:p="http://schemas.openxmlformats.org/presentationml/2006/main" xmlns:a="http://schemas.openxmlformats.org/drawingml/2006/main" xmlns:r="http://schemas.openxmlformats.org/officeDocument/2006/relationships">
+<p:sld xmlns:a="http://schemas.openxmlformats.org/drawingml/2006/main" xmlns:r="http://schemas.openxmlformats.org/officeDocument/2006/relationships" xmlns:p="http://schemas.openxmlformats.org/presentationml/2006/main">
   <p:cSld>
     <p:spTree>
       <p:nvGrpSpPr>
@@ -5221,12 +4546,12 @@
       </p:grpSpPr>
       <p:grpSp>
         <p:nvGrpSpPr>
-          <p:cNvPr name="Group 2" id="2"/>
+          <p:cNvPr id="2" name="Group 2"/>
           <p:cNvGrpSpPr/>
           <p:nvPr/>
         </p:nvGrpSpPr>
         <p:grpSpPr>
-          <a:xfrm rot="0">
+          <a:xfrm>
             <a:off x="1028700" y="7644638"/>
             <a:ext cx="7879612" cy="2642362"/>
             <a:chOff x="0" y="0"/>
@@ -5235,7 +4560,7 @@
         </p:grpSpPr>
         <p:sp>
           <p:nvSpPr>
-            <p:cNvPr name="Freeform 3" id="3">
+            <p:cNvPr id="3" name="Freeform 3">
               <a:extLst>
                 <a:ext uri="{C183D7F6-B498-43B3-948B-1728B52AA6E4}">
                   <adec:decorative xmlns:adec="http://schemas.microsoft.com/office/drawing/2017/decorative" val="1"/>
@@ -5246,7 +4571,7 @@
             <p:nvPr/>
           </p:nvSpPr>
           <p:spPr>
-            <a:xfrm flipH="false" flipV="false" rot="0">
+            <a:xfrm>
               <a:off x="0" y="0"/>
               <a:ext cx="2665449" cy="893836"/>
             </a:xfrm>
@@ -5255,9 +4580,9 @@
               <a:gdLst/>
               <a:ahLst/>
               <a:cxnLst/>
-              <a:rect r="r" b="b" t="t" l="l"/>
+              <a:rect l="l" t="t" r="r" b="b"/>
               <a:pathLst>
-                <a:path h="893836" w="2665449">
+                <a:path w="2665449" h="893836">
                   <a:moveTo>
                     <a:pt x="0" y="0"/>
                   </a:moveTo>
@@ -5278,16 +4603,23 @@
               <a:srgbClr val="266041"/>
             </a:solidFill>
           </p:spPr>
+          <p:txBody>
+            <a:bodyPr/>
+            <a:lstStyle/>
+            <a:p>
+              <a:endParaRPr lang="fr-FR"/>
+            </a:p>
+          </p:txBody>
         </p:sp>
       </p:grpSp>
       <p:sp>
         <p:nvSpPr>
-          <p:cNvPr name="Freeform 4" id="4"/>
+          <p:cNvPr id="4" name="Freeform 4"/>
           <p:cNvSpPr/>
           <p:nvPr/>
         </p:nvSpPr>
         <p:spPr>
-          <a:xfrm flipH="false" flipV="false" rot="0">
+          <a:xfrm>
             <a:off x="1441819" y="483253"/>
             <a:ext cx="15404361" cy="7008984"/>
           </a:xfrm>
@@ -5296,9 +4628,9 @@
             <a:gdLst/>
             <a:ahLst/>
             <a:cxnLst/>
-            <a:rect r="r" b="b" t="t" l="l"/>
+            <a:rect l="l" t="t" r="r" b="b"/>
             <a:pathLst>
-              <a:path h="7008984" w="15404361">
+              <a:path w="15404361" h="7008984">
                 <a:moveTo>
                   <a:pt x="0" y="0"/>
                 </a:moveTo>
@@ -5321,19 +4653,26 @@
           <a:blipFill>
             <a:blip r:embed="rId2"/>
             <a:stretch>
-              <a:fillRect l="0" t="0" r="0" b="0"/>
+              <a:fillRect/>
             </a:stretch>
           </a:blipFill>
         </p:spPr>
-      </p:sp>
-      <p:sp>
-        <p:nvSpPr>
-          <p:cNvPr name="TextBox 5" id="5"/>
-          <p:cNvSpPr txBox="true"/>
+        <p:txBody>
+          <a:bodyPr/>
+          <a:lstStyle/>
+          <a:p>
+            <a:endParaRPr lang="fr-FR"/>
+          </a:p>
+        </p:txBody>
+      </p:sp>
+      <p:sp>
+        <p:nvSpPr>
+          <p:cNvPr id="5" name="TextBox 5"/>
+          <p:cNvSpPr txBox="1"/>
           <p:nvPr/>
         </p:nvSpPr>
         <p:spPr>
-          <a:xfrm rot="0">
+          <a:xfrm>
             <a:off x="1684335" y="8606742"/>
             <a:ext cx="6785978" cy="1094757"/>
           </a:xfrm>
@@ -5342,7 +4681,7 @@
           </a:prstGeom>
         </p:spPr>
         <p:txBody>
-          <a:bodyPr anchor="t" rtlCol="false" tIns="0" lIns="0" bIns="0" rIns="0">
+          <a:bodyPr lIns="0" tIns="0" rIns="0" bIns="0" rtlCol="0" anchor="t">
             <a:spAutoFit/>
           </a:bodyPr>
           <a:lstStyle/>
@@ -5353,7 +4692,7 @@
               </a:lnSpc>
             </a:pPr>
             <a:r>
-              <a:rPr lang="en-US" sz="6400" b="true">
+              <a:rPr lang="en-US" sz="6400" b="1">
                 <a:solidFill>
                   <a:srgbClr val="FFFFFF"/>
                 </a:solidFill>
@@ -5369,12 +4708,12 @@
       </p:sp>
       <p:sp>
         <p:nvSpPr>
-          <p:cNvPr name="TextBox 6" id="6"/>
-          <p:cNvSpPr txBox="true"/>
+          <p:cNvPr id="6" name="TextBox 6"/>
+          <p:cNvSpPr txBox="1"/>
           <p:nvPr/>
         </p:nvSpPr>
         <p:spPr>
-          <a:xfrm rot="0">
+          <a:xfrm>
             <a:off x="1684335" y="8158270"/>
             <a:ext cx="6785978" cy="481297"/>
           </a:xfrm>
@@ -5383,7 +4722,7 @@
           </a:prstGeom>
         </p:spPr>
         <p:txBody>
-          <a:bodyPr anchor="t" rtlCol="false" tIns="0" lIns="0" bIns="0" rIns="0">
+          <a:bodyPr lIns="0" tIns="0" rIns="0" bIns="0" rtlCol="0" anchor="t">
             <a:spAutoFit/>
           </a:bodyPr>
           <a:lstStyle/>
@@ -5413,12 +4752,12 @@
       </p:sp>
       <p:sp>
         <p:nvSpPr>
-          <p:cNvPr name="TextBox 7" id="7"/>
-          <p:cNvSpPr txBox="true"/>
+          <p:cNvPr id="7" name="TextBox 7"/>
+          <p:cNvSpPr txBox="1"/>
           <p:nvPr/>
         </p:nvSpPr>
         <p:spPr>
-          <a:xfrm rot="0">
+          <a:xfrm>
             <a:off x="9527360" y="8378159"/>
             <a:ext cx="8596189" cy="1323340"/>
           </a:xfrm>
@@ -5427,7 +4766,7 @@
           </a:prstGeom>
         </p:spPr>
         <p:txBody>
-          <a:bodyPr anchor="t" rtlCol="false" tIns="0" lIns="0" bIns="0" rIns="0">
+          <a:bodyPr lIns="0" tIns="0" rIns="0" bIns="0" rtlCol="0" anchor="t">
             <a:spAutoFit/>
           </a:bodyPr>
           <a:lstStyle/>
@@ -5447,22 +4786,10 @@
                 <a:cs typeface="Open Sauce"/>
                 <a:sym typeface="Open Sauce"/>
               </a:rPr>
-              <a:t>Th</a:t>
-            </a:r>
-            <a:r>
-              <a:rPr lang="en-US" sz="1899" spc="37">
-                <a:solidFill>
-                  <a:srgbClr val="1A3B29"/>
-                </a:solidFill>
-                <a:latin typeface="Open Sauce"/>
-                <a:ea typeface="Open Sauce"/>
-                <a:cs typeface="Open Sauce"/>
-                <a:sym typeface="Open Sauce"/>
-              </a:rPr>
-              <a:t>e visualization reveals that simple questions generate</a:t>
-            </a:r>
-            <a:r>
-              <a:rPr lang="en-US" sz="1899" spc="37" u="none">
+              <a:t>The visualization reveals that simple questions generate</a:t>
+            </a:r>
+            <a:r>
+              <a:rPr lang="en-US" sz="1899" u="none" spc="37">
                 <a:solidFill>
                   <a:srgbClr val="1A3B29"/>
                 </a:solidFill>
@@ -5485,7 +4812,7 @@
 </file>
 
 <file path=ppt/slides/slide7.xml><?xml version="1.0" encoding="utf-8"?>
-<p:sld xmlns:p="http://schemas.openxmlformats.org/presentationml/2006/main" xmlns:a="http://schemas.openxmlformats.org/drawingml/2006/main" xmlns:r="http://schemas.openxmlformats.org/officeDocument/2006/relationships">
+<p:sld xmlns:a="http://schemas.openxmlformats.org/drawingml/2006/main" xmlns:r="http://schemas.openxmlformats.org/officeDocument/2006/relationships" xmlns:p="http://schemas.openxmlformats.org/presentationml/2006/main">
   <p:cSld>
     <p:spTree>
       <p:nvGrpSpPr>
@@ -5503,12 +4830,12 @@
       </p:grpSpPr>
       <p:grpSp>
         <p:nvGrpSpPr>
-          <p:cNvPr name="Group 2" id="2"/>
+          <p:cNvPr id="2" name="Group 2"/>
           <p:cNvGrpSpPr/>
           <p:nvPr/>
         </p:nvGrpSpPr>
         <p:grpSpPr>
-          <a:xfrm rot="0">
+          <a:xfrm>
             <a:off x="0" y="8190636"/>
             <a:ext cx="18477077" cy="3342771"/>
             <a:chOff x="0" y="0"/>
@@ -5517,7 +4844,7 @@
         </p:grpSpPr>
         <p:sp>
           <p:nvSpPr>
-            <p:cNvPr name="Freeform 3" id="3">
+            <p:cNvPr id="3" name="Freeform 3">
               <a:extLst>
                 <a:ext uri="{C183D7F6-B498-43B3-948B-1728B52AA6E4}">
                   <adec:decorative xmlns:adec="http://schemas.microsoft.com/office/drawing/2017/decorative" val="1"/>
@@ -5528,7 +4855,7 @@
             <p:nvPr/>
           </p:nvSpPr>
           <p:spPr>
-            <a:xfrm flipH="false" flipV="false" rot="0">
+            <a:xfrm>
               <a:off x="0" y="0"/>
               <a:ext cx="8493842" cy="1536659"/>
             </a:xfrm>
@@ -5537,9 +4864,9 @@
               <a:gdLst/>
               <a:ahLst/>
               <a:cxnLst/>
-              <a:rect r="r" b="b" t="t" l="l"/>
+              <a:rect l="l" t="t" r="r" b="b"/>
               <a:pathLst>
-                <a:path h="1536659" w="8493842">
+                <a:path w="8493842" h="1536659">
                   <a:moveTo>
                     <a:pt x="0" y="0"/>
                   </a:moveTo>
@@ -5560,16 +4887,23 @@
               <a:srgbClr val="266041"/>
             </a:solidFill>
           </p:spPr>
+          <p:txBody>
+            <a:bodyPr/>
+            <a:lstStyle/>
+            <a:p>
+              <a:endParaRPr lang="fr-FR"/>
+            </a:p>
+          </p:txBody>
         </p:sp>
       </p:grpSp>
       <p:sp>
         <p:nvSpPr>
-          <p:cNvPr name="Freeform 4" id="4"/>
+          <p:cNvPr id="4" name="Freeform 4"/>
           <p:cNvSpPr/>
           <p:nvPr/>
         </p:nvSpPr>
         <p:spPr>
-          <a:xfrm flipH="false" flipV="false" rot="0">
+          <a:xfrm>
             <a:off x="470316" y="126745"/>
             <a:ext cx="17347368" cy="8044842"/>
           </a:xfrm>
@@ -5578,9 +4912,9 @@
             <a:gdLst/>
             <a:ahLst/>
             <a:cxnLst/>
-            <a:rect r="r" b="b" t="t" l="l"/>
+            <a:rect l="l" t="t" r="r" b="b"/>
             <a:pathLst>
-              <a:path h="8044842" w="17347368">
+              <a:path w="17347368" h="8044842">
                 <a:moveTo>
                   <a:pt x="0" y="0"/>
                 </a:moveTo>
@@ -5603,19 +4937,26 @@
           <a:blipFill>
             <a:blip r:embed="rId2"/>
             <a:stretch>
-              <a:fillRect l="0" t="0" r="0" b="0"/>
+              <a:fillRect/>
             </a:stretch>
           </a:blipFill>
         </p:spPr>
-      </p:sp>
-      <p:sp>
-        <p:nvSpPr>
-          <p:cNvPr name="TextBox 5" id="5"/>
-          <p:cNvSpPr txBox="true"/>
+        <p:txBody>
+          <a:bodyPr/>
+          <a:lstStyle/>
+          <a:p>
+            <a:endParaRPr lang="fr-FR"/>
+          </a:p>
+        </p:txBody>
+      </p:sp>
+      <p:sp>
+        <p:nvSpPr>
+          <p:cNvPr id="5" name="TextBox 5"/>
+          <p:cNvSpPr txBox="1"/>
           <p:nvPr/>
         </p:nvSpPr>
         <p:spPr>
-          <a:xfrm rot="0">
+          <a:xfrm>
             <a:off x="722441" y="8351886"/>
             <a:ext cx="4993523" cy="350253"/>
           </a:xfrm>
@@ -5624,7 +4965,7 @@
           </a:prstGeom>
         </p:spPr>
         <p:txBody>
-          <a:bodyPr anchor="t" rtlCol="false" tIns="0" lIns="0" bIns="0" rIns="0">
+          <a:bodyPr lIns="0" tIns="0" rIns="0" bIns="0" rtlCol="0" anchor="t">
             <a:spAutoFit/>
           </a:bodyPr>
           <a:lstStyle/>
@@ -5638,7 +4979,7 @@
               </a:spcBef>
             </a:pPr>
             <a:r>
-              <a:rPr lang="en-US" sz="2060">
+              <a:rPr lang="en-US" sz="2060" dirty="0">
                 <a:solidFill>
                   <a:srgbClr val="FFFFFF"/>
                 </a:solidFill>
@@ -5654,12 +4995,12 @@
       </p:sp>
       <p:sp>
         <p:nvSpPr>
-          <p:cNvPr name="TextBox 6" id="6"/>
-          <p:cNvSpPr txBox="true"/>
+          <p:cNvPr id="6" name="TextBox 6"/>
+          <p:cNvSpPr txBox="1"/>
           <p:nvPr/>
         </p:nvSpPr>
         <p:spPr>
-          <a:xfrm rot="0">
+          <a:xfrm>
             <a:off x="722441" y="9220200"/>
             <a:ext cx="12967385" cy="274304"/>
           </a:xfrm>
@@ -5668,12 +5009,12 @@
           </a:prstGeom>
         </p:spPr>
         <p:txBody>
-          <a:bodyPr anchor="t" rtlCol="false" tIns="0" lIns="0" bIns="0" rIns="0">
+          <a:bodyPr lIns="0" tIns="0" rIns="0" bIns="0" rtlCol="0" anchor="t">
             <a:spAutoFit/>
           </a:bodyPr>
           <a:lstStyle/>
           <a:p>
-            <a:pPr algn="l" marL="0" indent="0" lvl="0">
+            <a:pPr marL="0" lvl="0" indent="0" algn="l">
               <a:lnSpc>
                 <a:spcPts val="2208"/>
               </a:lnSpc>
@@ -5705,7 +5046,7 @@
 </file>
 
 <file path=ppt/slides/slide8.xml><?xml version="1.0" encoding="utf-8"?>
-<p:sld xmlns:p="http://schemas.openxmlformats.org/presentationml/2006/main" xmlns:a="http://schemas.openxmlformats.org/drawingml/2006/main" xmlns:r="http://schemas.openxmlformats.org/officeDocument/2006/relationships">
+<p:sld xmlns:a="http://schemas.openxmlformats.org/drawingml/2006/main" xmlns:r="http://schemas.openxmlformats.org/officeDocument/2006/relationships" xmlns:p="http://schemas.openxmlformats.org/presentationml/2006/main">
   <p:cSld>
     <p:spTree>
       <p:nvGrpSpPr>
@@ -5723,12 +5064,12 @@
       </p:grpSpPr>
       <p:sp>
         <p:nvSpPr>
-          <p:cNvPr name="TextBox 2" id="2"/>
-          <p:cNvSpPr txBox="true"/>
+          <p:cNvPr id="2" name="TextBox 2"/>
+          <p:cNvSpPr txBox="1"/>
           <p:nvPr/>
         </p:nvSpPr>
         <p:spPr>
-          <a:xfrm rot="0">
+          <a:xfrm>
             <a:off x="1773663" y="2939685"/>
             <a:ext cx="4919329" cy="1094784"/>
           </a:xfrm>
@@ -5737,7 +5078,7 @@
           </a:prstGeom>
         </p:spPr>
         <p:txBody>
-          <a:bodyPr anchor="t" rtlCol="false" tIns="0" lIns="0" bIns="0" rIns="0">
+          <a:bodyPr lIns="0" tIns="0" rIns="0" bIns="0" rtlCol="0" anchor="t">
             <a:spAutoFit/>
           </a:bodyPr>
           <a:lstStyle/>
@@ -5748,7 +5089,7 @@
               </a:lnSpc>
             </a:pPr>
             <a:r>
-              <a:rPr lang="en-US" sz="6400" b="true">
+              <a:rPr lang="en-US" sz="6400" b="1">
                 <a:solidFill>
                   <a:srgbClr val="1A3B29"/>
                 </a:solidFill>
@@ -5764,12 +5105,12 @@
       </p:sp>
       <p:sp>
         <p:nvSpPr>
-          <p:cNvPr name="TextBox 3" id="3"/>
-          <p:cNvSpPr txBox="true"/>
+          <p:cNvPr id="3" name="TextBox 3"/>
+          <p:cNvSpPr txBox="1"/>
           <p:nvPr/>
         </p:nvSpPr>
         <p:spPr>
-          <a:xfrm rot="0">
+          <a:xfrm>
             <a:off x="7236664" y="2927076"/>
             <a:ext cx="9626096" cy="2325106"/>
           </a:xfrm>
@@ -5778,7 +5119,7 @@
           </a:prstGeom>
         </p:spPr>
         <p:txBody>
-          <a:bodyPr anchor="t" rtlCol="false" tIns="0" lIns="0" bIns="0" rIns="0">
+          <a:bodyPr lIns="0" tIns="0" rIns="0" bIns="0" rtlCol="0" anchor="t">
             <a:spAutoFit/>
           </a:bodyPr>
           <a:lstStyle/>
@@ -5801,7 +5142,7 @@
               <a:t>This analysis highlights the relationship between language model</a:t>
             </a:r>
             <a:r>
-              <a:rPr lang="en-US" sz="2199" spc="43" u="none">
+              <a:rPr lang="en-US" sz="2199" u="none" spc="43">
                 <a:solidFill>
                   <a:srgbClr val="1A3B29"/>
                 </a:solidFill>
@@ -5819,6 +5160,15 @@
                 <a:spcPts val="3079"/>
               </a:lnSpc>
             </a:pPr>
+            <a:endParaRPr lang="en-US" sz="2199" u="none" spc="43">
+              <a:solidFill>
+                <a:srgbClr val="1A3B29"/>
+              </a:solidFill>
+              <a:latin typeface="Open Sauce"/>
+              <a:ea typeface="Open Sauce"/>
+              <a:cs typeface="Open Sauce"/>
+              <a:sym typeface="Open Sauce"/>
+            </a:endParaRPr>
           </a:p>
           <a:p>
             <a:pPr algn="l">
@@ -5827,7 +5177,7 @@
               </a:lnSpc>
             </a:pPr>
             <a:r>
-              <a:rPr lang="en-US" sz="2199" spc="43" u="none">
+              <a:rPr lang="en-US" sz="2199" u="none" spc="43">
                 <a:solidFill>
                   <a:srgbClr val="1A3B29"/>
                 </a:solidFill>
@@ -5843,21 +5193,21 @@
       </p:sp>
       <p:sp>
         <p:nvSpPr>
-          <p:cNvPr name="TextBox 4" id="4"/>
-          <p:cNvSpPr txBox="true"/>
+          <p:cNvPr id="4" name="TextBox 4"/>
+          <p:cNvSpPr txBox="1"/>
           <p:nvPr/>
         </p:nvSpPr>
         <p:spPr>
-          <a:xfrm rot="0">
+          <a:xfrm>
             <a:off x="7307406" y="6005976"/>
-            <a:ext cx="9484612" cy="2715587"/>
+            <a:ext cx="9484612" cy="2748253"/>
           </a:xfrm>
           <a:prstGeom prst="rect">
             <a:avLst/>
           </a:prstGeom>
         </p:spPr>
         <p:txBody>
-          <a:bodyPr anchor="t" rtlCol="false" tIns="0" lIns="0" bIns="0" rIns="0">
+          <a:bodyPr lIns="0" tIns="0" rIns="0" bIns="0" rtlCol="0" anchor="t">
             <a:spAutoFit/>
           </a:bodyPr>
           <a:lstStyle/>
@@ -5868,7 +5218,7 @@
               </a:lnSpc>
             </a:pPr>
             <a:r>
-              <a:rPr lang="en-US" sz="2199" spc="43">
+              <a:rPr lang="en-US" sz="2199" spc="43" dirty="0">
                 <a:solidFill>
                   <a:srgbClr val="1A3B29"/>
                 </a:solidFill>
@@ -5877,10 +5227,10 @@
                 <a:cs typeface="Open Sauce"/>
                 <a:sym typeface="Open Sauce"/>
               </a:rPr>
-              <a:t>Conversely, Small</a:t>
-            </a:r>
-            <a:r>
-              <a:rPr lang="en-US" sz="2199" spc="43">
+              <a:t>Conversely, Small models are distinguished by their energy efficiency, a</a:t>
+            </a:r>
+            <a:r>
+              <a:rPr lang="en-US" sz="2199" u="none" spc="43" dirty="0">
                 <a:solidFill>
                   <a:srgbClr val="1A3B29"/>
                 </a:solidFill>
@@ -5889,10 +5239,10 @@
                 <a:cs typeface="Open Sauce"/>
                 <a:sym typeface="Open Sauce"/>
               </a:rPr>
-              <a:t> models are distinguished by their energy efficiency, a</a:t>
-            </a:r>
-            <a:r>
-              <a:rPr lang="en-US" sz="2199" spc="43" u="none">
+              <a:t>lthough they may have certain limitations in terms of accuracy on complex tasks, reasoning </a:t>
+            </a:r>
+            <a:r>
+              <a:rPr lang="en-US" sz="2199" u="none" spc="43">
                 <a:solidFill>
                   <a:srgbClr val="1A3B29"/>
                 </a:solidFill>
@@ -5901,8 +5251,17 @@
                 <a:cs typeface="Open Sauce"/>
                 <a:sym typeface="Open Sauce"/>
               </a:rPr>
-              <a:t>lthough they may have certain limitations in terms of accuracy on complex tasks.</a:t>
-            </a:r>
+              <a:t>for example.</a:t>
+            </a:r>
+            <a:endParaRPr lang="en-US" sz="2199" u="none" spc="43" dirty="0">
+              <a:solidFill>
+                <a:srgbClr val="1A3B29"/>
+              </a:solidFill>
+              <a:latin typeface="Open Sauce"/>
+              <a:ea typeface="Open Sauce"/>
+              <a:cs typeface="Open Sauce"/>
+              <a:sym typeface="Open Sauce"/>
+            </a:endParaRPr>
           </a:p>
           <a:p>
             <a:pPr algn="l">
@@ -5910,6 +5269,15 @@
                 <a:spcPts val="3079"/>
               </a:lnSpc>
             </a:pPr>
+            <a:endParaRPr lang="en-US" sz="2199" u="none" spc="43" dirty="0">
+              <a:solidFill>
+                <a:srgbClr val="1A3B29"/>
+              </a:solidFill>
+              <a:latin typeface="Open Sauce"/>
+              <a:ea typeface="Open Sauce"/>
+              <a:cs typeface="Open Sauce"/>
+              <a:sym typeface="Open Sauce"/>
+            </a:endParaRPr>
           </a:p>
           <a:p>
             <a:pPr algn="l">
@@ -5918,7 +5286,7 @@
               </a:lnSpc>
             </a:pPr>
             <a:r>
-              <a:rPr lang="en-US" sz="2199" spc="43" u="none">
+              <a:rPr lang="en-US" sz="2199" spc="43" dirty="0">
                 <a:solidFill>
                   <a:srgbClr val="1A3B29"/>
                 </a:solidFill>
@@ -5927,10 +5295,10 @@
                 <a:cs typeface="Open Sauce"/>
                 <a:sym typeface="Open Sauce"/>
               </a:rPr>
-              <a:t>F</a:t>
-            </a:r>
-            <a:r>
-              <a:rPr lang="en-US" sz="2199" spc="43" u="none">
+              <a:t>But</a:t>
+            </a:r>
+            <a:r>
+              <a:rPr lang="en-US" sz="2199" u="none" spc="43" dirty="0">
                 <a:solidFill>
                   <a:srgbClr val="1A3B29"/>
                 </a:solidFill>
@@ -5939,14 +5307,38 @@
                 <a:cs typeface="Open Sauce"/>
                 <a:sym typeface="Open Sauce"/>
               </a:rPr>
-              <a:t>inally, Large models, although powerful and effective on advanced issues, have a particularly high ecological cost, which raises questions about their relevance for everyday use.</a:t>
-            </a:r>
-          </a:p>
-        </p:txBody>
-      </p:sp>
-      <p:sp>
-        <p:nvSpPr>
-          <p:cNvPr name="AutoShape 5" id="5">
+              <a:t>, Large models, although powerful and effective on advanced </a:t>
+            </a:r>
+            <a:r>
+              <a:rPr lang="en-US" sz="2199" spc="43" dirty="0">
+                <a:solidFill>
+                  <a:srgbClr val="1A3B29"/>
+                </a:solidFill>
+                <a:latin typeface="Open Sauce"/>
+                <a:ea typeface="Open Sauce"/>
+                <a:cs typeface="Open Sauce"/>
+                <a:sym typeface="Open Sauce"/>
+              </a:rPr>
+              <a:t>question, they</a:t>
+            </a:r>
+            <a:r>
+              <a:rPr lang="en-US" sz="2199" u="none" spc="43" dirty="0">
+                <a:solidFill>
+                  <a:srgbClr val="1A3B29"/>
+                </a:solidFill>
+                <a:latin typeface="Open Sauce"/>
+                <a:ea typeface="Open Sauce"/>
+                <a:cs typeface="Open Sauce"/>
+                <a:sym typeface="Open Sauce"/>
+              </a:rPr>
+              <a:t> have a high ecological cost, which raises questions about their relevance for everyday use.</a:t>
+            </a:r>
+          </a:p>
+        </p:txBody>
+      </p:sp>
+      <p:sp>
+        <p:nvSpPr>
+          <p:cNvPr id="5" name="AutoShape 5">
             <a:extLst>
               <a:ext uri="{C183D7F6-B498-43B3-948B-1728B52AA6E4}">
                 <adec:decorative xmlns:adec="http://schemas.microsoft.com/office/drawing/2017/decorative" val="1"/>
@@ -5964,24 +5356,31 @@
           <a:prstGeom prst="line">
             <a:avLst/>
           </a:prstGeom>
-          <a:ln cap="rnd" w="47625">
+          <a:ln w="47625" cap="rnd">
             <a:solidFill>
               <a:srgbClr val="266041"/>
             </a:solidFill>
             <a:prstDash val="solid"/>
-            <a:headEnd type="none" len="sm" w="sm"/>
-            <a:tailEnd type="none" len="sm" w="sm"/>
+            <a:headEnd type="none" w="sm" len="sm"/>
+            <a:tailEnd type="none" w="sm" len="sm"/>
           </a:ln>
         </p:spPr>
+        <p:txBody>
+          <a:bodyPr/>
+          <a:lstStyle/>
+          <a:p>
+            <a:endParaRPr lang="fr-FR"/>
+          </a:p>
+        </p:txBody>
       </p:sp>
       <p:grpSp>
         <p:nvGrpSpPr>
-          <p:cNvPr name="Group 6" id="6"/>
+          <p:cNvPr id="6" name="Group 6"/>
           <p:cNvGrpSpPr/>
           <p:nvPr/>
         </p:nvGrpSpPr>
         <p:grpSpPr>
-          <a:xfrm rot="0">
+          <a:xfrm>
             <a:off x="1773663" y="1028700"/>
             <a:ext cx="3509173" cy="744963"/>
             <a:chOff x="0" y="0"/>
@@ -5990,12 +5389,12 @@
         </p:grpSpPr>
         <p:sp>
           <p:nvSpPr>
-            <p:cNvPr name="Freeform 7" id="7"/>
+            <p:cNvPr id="7" name="Freeform 7"/>
             <p:cNvSpPr/>
             <p:nvPr/>
           </p:nvSpPr>
           <p:spPr>
-            <a:xfrm flipH="false" flipV="false" rot="0">
+            <a:xfrm>
               <a:off x="0" y="0"/>
               <a:ext cx="993284" cy="993284"/>
             </a:xfrm>
@@ -6004,9 +5403,9 @@
               <a:gdLst/>
               <a:ahLst/>
               <a:cxnLst/>
-              <a:rect r="r" b="b" t="t" l="l"/>
+              <a:rect l="l" t="t" r="r" b="b"/>
               <a:pathLst>
-                <a:path h="993284" w="993284">
+                <a:path w="993284" h="993284">
                   <a:moveTo>
                     <a:pt x="0" y="0"/>
                   </a:moveTo>
@@ -6035,19 +5434,26 @@
                 </a:extLst>
               </a:blip>
               <a:stretch>
-                <a:fillRect l="0" t="0" r="0" b="0"/>
+                <a:fillRect/>
               </a:stretch>
             </a:blipFill>
           </p:spPr>
+          <p:txBody>
+            <a:bodyPr/>
+            <a:lstStyle/>
+            <a:p>
+              <a:endParaRPr lang="fr-FR"/>
+            </a:p>
+          </p:txBody>
         </p:sp>
         <p:sp>
           <p:nvSpPr>
-            <p:cNvPr name="TextBox 8" id="8"/>
-            <p:cNvSpPr txBox="true"/>
+            <p:cNvPr id="8" name="TextBox 8"/>
+            <p:cNvSpPr txBox="1"/>
             <p:nvPr/>
           </p:nvSpPr>
           <p:spPr>
-            <a:xfrm rot="0">
+            <a:xfrm>
               <a:off x="1211579" y="244504"/>
               <a:ext cx="3467318" cy="547100"/>
             </a:xfrm>
@@ -6056,7 +5462,7 @@
             </a:prstGeom>
           </p:spPr>
           <p:txBody>
-            <a:bodyPr anchor="t" rtlCol="false" tIns="0" lIns="0" bIns="0" rIns="0">
+            <a:bodyPr lIns="0" tIns="0" rIns="0" bIns="0" rtlCol="0" anchor="t">
               <a:spAutoFit/>
             </a:bodyPr>
             <a:lstStyle/>
